--- a/slides/weekly/Week_1_AI_Builders_Meet_Your_AI_Teammate.pptx
+++ b/slides/weekly/Week_1_AI_Builders_Meet_Your_AI_Teammate.pptx
@@ -6,6 +6,14 @@
   </p:sldMasterIdLst>
   <p:sldIdLst>
     <p:sldId id="256" r:id="rId7"/>
+    <p:sldId id="257" r:id="rId8"/>
+    <p:sldId id="258" r:id="rId9"/>
+    <p:sldId id="259" r:id="rId10"/>
+    <p:sldId id="260" r:id="rId11"/>
+    <p:sldId id="261" r:id="rId12"/>
+    <p:sldId id="262" r:id="rId13"/>
+    <p:sldId id="263" r:id="rId14"/>
+    <p:sldId id="264" r:id="rId15"/>
   </p:sldIdLst>
   <p:sldSz cx="12191695" cy="6858000" type="screen4x3"/>
   <p:notesSz cx="6858000" cy="9144000"/>
@@ -3084,6 +3092,328 @@
     <p:bg>
       <p:bgPr>
         <a:solidFill>
+          <a:srgbClr val="0F172A"/>
+        </a:solidFill>
+        <a:effectLst/>
+      </p:bgPr>
+    </p:bg>
+    <p:spTree>
+      <p:nvGrpSpPr>
+        <p:cNvPr id="1" name=""/>
+        <p:cNvGrpSpPr/>
+        <p:nvPr/>
+      </p:nvGrpSpPr>
+      <p:grpSpPr/>
+      <p:sp>
+        <p:nvSpPr>
+          <p:cNvPr id="2" name="Rounded Rectangle 1"/>
+          <p:cNvSpPr/>
+          <p:nvPr/>
+        </p:nvSpPr>
+        <p:spPr>
+          <a:xfrm>
+            <a:off x="8138160" y="-457200"/>
+            <a:ext cx="2926080" cy="2926080"/>
+          </a:xfrm>
+          <a:prstGeom prst="roundRect">
+            <a:avLst/>
+          </a:prstGeom>
+          <a:solidFill>
+            <a:srgbClr val="2563EB"/>
+          </a:solidFill>
+          <a:ln>
+            <a:solidFill>
+              <a:srgbClr val="2563EB"/>
+            </a:solidFill>
+          </a:ln>
+        </p:spPr>
+        <p:style>
+          <a:lnRef idx="1">
+            <a:schemeClr val="accent1"/>
+          </a:lnRef>
+          <a:fillRef idx="3">
+            <a:schemeClr val="accent1"/>
+          </a:fillRef>
+          <a:effectRef idx="2">
+            <a:schemeClr val="accent1"/>
+          </a:effectRef>
+          <a:fontRef idx="minor">
+            <a:schemeClr val="lt1"/>
+          </a:fontRef>
+        </p:style>
+        <p:txBody>
+          <a:bodyPr rtlCol="0" anchor="ctr"/>
+          <a:lstStyle/>
+          <a:p>
+            <a:pPr algn="ctr"/>
+          </a:p>
+        </p:txBody>
+      </p:sp>
+      <p:sp>
+        <p:nvSpPr>
+          <p:cNvPr id="3" name="Rounded Rectangle 2"/>
+          <p:cNvSpPr/>
+          <p:nvPr/>
+        </p:nvSpPr>
+        <p:spPr>
+          <a:xfrm>
+            <a:off x="685800" y="713232"/>
+            <a:ext cx="1554480" cy="347472"/>
+          </a:xfrm>
+          <a:prstGeom prst="roundRect">
+            <a:avLst/>
+          </a:prstGeom>
+          <a:solidFill>
+            <a:srgbClr val="2563EB"/>
+          </a:solidFill>
+          <a:ln>
+            <a:solidFill>
+              <a:srgbClr val="2563EB"/>
+            </a:solidFill>
+          </a:ln>
+        </p:spPr>
+        <p:style>
+          <a:lnRef idx="1">
+            <a:schemeClr val="accent1"/>
+          </a:lnRef>
+          <a:fillRef idx="3">
+            <a:schemeClr val="accent1"/>
+          </a:fillRef>
+          <a:effectRef idx="2">
+            <a:schemeClr val="accent1"/>
+          </a:effectRef>
+          <a:fontRef idx="minor">
+            <a:schemeClr val="lt1"/>
+          </a:fontRef>
+        </p:style>
+        <p:txBody>
+          <a:bodyPr rtlCol="0" anchor="ctr"/>
+          <a:lstStyle/>
+          <a:p>
+            <a:pPr algn="ctr"/>
+          </a:p>
+        </p:txBody>
+      </p:sp>
+      <p:sp>
+        <p:nvSpPr>
+          <p:cNvPr id="4" name="TextBox 3"/>
+          <p:cNvSpPr txBox="1"/>
+          <p:nvPr/>
+        </p:nvSpPr>
+        <p:spPr>
+          <a:xfrm>
+            <a:off x="841248" y="786384"/>
+            <a:ext cx="1234440" cy="164592"/>
+          </a:xfrm>
+          <a:prstGeom prst="rect">
+            <a:avLst/>
+          </a:prstGeom>
+          <a:noFill/>
+        </p:spPr>
+        <p:txBody>
+          <a:bodyPr wrap="square" anchor="t">
+            <a:spAutoFit/>
+          </a:bodyPr>
+          <a:lstStyle/>
+          <a:p>
+            <a:pPr algn="ctr"/>
+            <a:r>
+              <a:rPr sz="1100" b="1">
+                <a:solidFill>
+                  <a:srgbClr val="FFFFFF"/>
+                </a:solidFill>
+                <a:latin typeface="Aptos"/>
+              </a:rPr>
+              <a:t>WEEK 1</a:t>
+            </a:r>
+          </a:p>
+        </p:txBody>
+      </p:sp>
+      <p:sp>
+        <p:nvSpPr>
+          <p:cNvPr id="5" name="TextBox 4"/>
+          <p:cNvSpPr txBox="1"/>
+          <p:nvPr/>
+        </p:nvSpPr>
+        <p:spPr>
+          <a:xfrm>
+            <a:off x="685800" y="1444752"/>
+            <a:ext cx="8869680" cy="749808"/>
+          </a:xfrm>
+          <a:prstGeom prst="rect">
+            <a:avLst/>
+          </a:prstGeom>
+          <a:noFill/>
+        </p:spPr>
+        <p:txBody>
+          <a:bodyPr wrap="square" anchor="t">
+            <a:spAutoFit/>
+          </a:bodyPr>
+          <a:lstStyle/>
+          <a:p>
+            <a:r>
+              <a:rPr sz="4400" b="1">
+                <a:solidFill>
+                  <a:srgbClr val="FFFFFF"/>
+                </a:solidFill>
+                <a:latin typeface="Aptos"/>
+              </a:rPr>
+              <a:t>Meet Your AI Teammate</a:t>
+            </a:r>
+          </a:p>
+        </p:txBody>
+      </p:sp>
+      <p:sp>
+        <p:nvSpPr>
+          <p:cNvPr id="6" name="TextBox 5"/>
+          <p:cNvSpPr txBox="1"/>
+          <p:nvPr/>
+        </p:nvSpPr>
+        <p:spPr>
+          <a:xfrm>
+            <a:off x="713232" y="2359152"/>
+            <a:ext cx="8778240" cy="457200"/>
+          </a:xfrm>
+          <a:prstGeom prst="rect">
+            <a:avLst/>
+          </a:prstGeom>
+          <a:noFill/>
+        </p:spPr>
+        <p:txBody>
+          <a:bodyPr wrap="square" anchor="t">
+            <a:spAutoFit/>
+          </a:bodyPr>
+          <a:lstStyle/>
+          <a:p>
+            <a:r>
+              <a:rPr sz="2200" b="0">
+                <a:solidFill>
+                  <a:srgbClr val="E2E8F0"/>
+                </a:solidFill>
+                <a:latin typeface="Aptos"/>
+              </a:rPr>
+              <a:t>ChatGPT Basics</a:t>
+            </a:r>
+          </a:p>
+        </p:txBody>
+      </p:sp>
+      <p:sp>
+        <p:nvSpPr>
+          <p:cNvPr id="7" name="TextBox 6"/>
+          <p:cNvSpPr txBox="1"/>
+          <p:nvPr/>
+        </p:nvSpPr>
+        <p:spPr>
+          <a:xfrm>
+            <a:off x="731520" y="4069080"/>
+            <a:ext cx="8961120" cy="640080"/>
+          </a:xfrm>
+          <a:prstGeom prst="rect">
+            <a:avLst/>
+          </a:prstGeom>
+          <a:noFill/>
+        </p:spPr>
+        <p:txBody>
+          <a:bodyPr wrap="square" anchor="t">
+            <a:spAutoFit/>
+          </a:bodyPr>
+          <a:lstStyle/>
+          <a:p>
+            <a:r>
+              <a:rPr sz="2000" b="0">
+                <a:solidFill>
+                  <a:srgbClr val="E2E8F0"/>
+                </a:solidFill>
+                <a:latin typeface="Aptos"/>
+              </a:rPr>
+              <a:t>ChatGPT is not just a search engine. It can act as a brainstorming partner, tutor, coach, writer, and project assistant.</a:t>
+            </a:r>
+          </a:p>
+        </p:txBody>
+      </p:sp>
+      <p:sp>
+        <p:nvSpPr>
+          <p:cNvPr id="8" name="TextBox 7"/>
+          <p:cNvSpPr txBox="1"/>
+          <p:nvPr/>
+        </p:nvSpPr>
+        <p:spPr>
+          <a:xfrm>
+            <a:off x="411480" y="6519672"/>
+            <a:ext cx="5303520" cy="164592"/>
+          </a:xfrm>
+          <a:prstGeom prst="rect">
+            <a:avLst/>
+          </a:prstGeom>
+          <a:noFill/>
+        </p:spPr>
+        <p:txBody>
+          <a:bodyPr wrap="square" anchor="t">
+            <a:spAutoFit/>
+          </a:bodyPr>
+          <a:lstStyle/>
+          <a:p>
+            <a:r>
+              <a:rPr sz="850" b="0">
+                <a:solidFill>
+                  <a:srgbClr val="56657B"/>
+                </a:solidFill>
+                <a:latin typeface="Aptos"/>
+              </a:rPr>
+              <a:t>AI Builders Academy | Week 1</a:t>
+            </a:r>
+          </a:p>
+        </p:txBody>
+      </p:sp>
+      <p:sp>
+        <p:nvSpPr>
+          <p:cNvPr id="9" name="TextBox 8"/>
+          <p:cNvSpPr txBox="1"/>
+          <p:nvPr/>
+        </p:nvSpPr>
+        <p:spPr>
+          <a:xfrm>
+            <a:off x="10972800" y="6519672"/>
+            <a:ext cx="822960" cy="164592"/>
+          </a:xfrm>
+          <a:prstGeom prst="rect">
+            <a:avLst/>
+          </a:prstGeom>
+          <a:noFill/>
+        </p:spPr>
+        <p:txBody>
+          <a:bodyPr wrap="square" anchor="t">
+            <a:spAutoFit/>
+          </a:bodyPr>
+          <a:lstStyle/>
+          <a:p>
+            <a:pPr algn="r"/>
+            <a:r>
+              <a:rPr sz="850" b="0">
+                <a:solidFill>
+                  <a:srgbClr val="56657B"/>
+                </a:solidFill>
+                <a:latin typeface="Aptos"/>
+              </a:rPr>
+              <a:t>1/9</a:t>
+            </a:r>
+          </a:p>
+        </p:txBody>
+      </p:sp>
+    </p:spTree>
+  </p:cSld>
+  <p:clrMapOvr>
+    <a:masterClrMapping/>
+  </p:clrMapOvr>
+</p:sld>
+</file>
+
+<file path=ppt/slides/slide2.xml><?xml version="1.0" encoding="utf-8"?>
+<p:sld xmlns:a="http://schemas.openxmlformats.org/drawingml/2006/main" xmlns:p="http://schemas.openxmlformats.org/presentationml/2006/main" xmlns:r="http://schemas.openxmlformats.org/officeDocument/2006/relationships">
+  <p:cSld>
+    <p:bg>
+      <p:bgPr>
+        <a:solidFill>
           <a:srgbClr val="F4F7FB"/>
         </a:solidFill>
         <a:effectLst/>
@@ -3150,7 +3480,7 @@
         <p:spPr>
           <a:xfrm>
             <a:off x="502920" y="164592"/>
-            <a:ext cx="1234440" cy="201168"/>
+            <a:ext cx="1143000" cy="201168"/>
           </a:xfrm>
           <a:prstGeom prst="rect">
             <a:avLst/>
@@ -3183,8 +3513,8 @@
         </p:nvSpPr>
         <p:spPr>
           <a:xfrm>
-            <a:off x="1554480" y="118872"/>
-            <a:ext cx="6309360" cy="320040"/>
+            <a:off x="1572768" y="109728"/>
+            <a:ext cx="6492240" cy="320040"/>
           </a:xfrm>
           <a:prstGeom prst="rect">
             <a:avLst/>
@@ -3217,8 +3547,8 @@
         </p:nvSpPr>
         <p:spPr>
           <a:xfrm>
-            <a:off x="7909560" y="182880"/>
-            <a:ext cx="3703320" cy="182880"/>
+            <a:off x="7909560" y="173736"/>
+            <a:ext cx="3749039" cy="182880"/>
           </a:xfrm>
           <a:prstGeom prst="rect">
             <a:avLst/>
@@ -3239,21 +3569,158 @@
                 </a:solidFill>
                 <a:latin typeface="Aptos"/>
               </a:rPr>
-              <a:t>ChatGPT basics + prompt formula</a:t>
-            </a:r>
-          </a:p>
-        </p:txBody>
-      </p:sp>
-      <p:sp>
-        <p:nvSpPr>
-          <p:cNvPr id="6" name="Rounded Rectangle 5"/>
+              <a:t>ChatGPT Basics</a:t>
+            </a:r>
+          </a:p>
+        </p:txBody>
+      </p:sp>
+      <p:sp>
+        <p:nvSpPr>
+          <p:cNvPr id="6" name="TextBox 5"/>
+          <p:cNvSpPr txBox="1"/>
+          <p:nvPr/>
+        </p:nvSpPr>
+        <p:spPr>
+          <a:xfrm>
+            <a:off x="658368" y="932688"/>
+            <a:ext cx="10698480" cy="475488"/>
+          </a:xfrm>
+          <a:prstGeom prst="rect">
+            <a:avLst/>
+          </a:prstGeom>
+          <a:noFill/>
+        </p:spPr>
+        <p:txBody>
+          <a:bodyPr wrap="square" anchor="t">
+            <a:spAutoFit/>
+          </a:bodyPr>
+          <a:lstStyle/>
+          <a:p>
+            <a:r>
+              <a:rPr sz="3100" b="1">
+                <a:solidFill>
+                  <a:srgbClr val="172033"/>
+                </a:solidFill>
+                <a:latin typeface="Aptos"/>
+              </a:rPr>
+              <a:t>Today’s target</a:t>
+            </a:r>
+          </a:p>
+        </p:txBody>
+      </p:sp>
+      <p:sp>
+        <p:nvSpPr>
+          <p:cNvPr id="7" name="TextBox 6"/>
+          <p:cNvSpPr txBox="1"/>
+          <p:nvPr/>
+        </p:nvSpPr>
+        <p:spPr>
+          <a:xfrm>
+            <a:off x="694944" y="1481328"/>
+            <a:ext cx="10424160" cy="256032"/>
+          </a:xfrm>
+          <a:prstGeom prst="rect">
+            <a:avLst/>
+          </a:prstGeom>
+          <a:noFill/>
+        </p:spPr>
+        <p:txBody>
+          <a:bodyPr wrap="square" anchor="t">
+            <a:spAutoFit/>
+          </a:bodyPr>
+          <a:lstStyle/>
+          <a:p>
+            <a:r>
+              <a:rPr sz="1500" b="0">
+                <a:solidFill>
+                  <a:srgbClr val="56657B"/>
+                </a:solidFill>
+                <a:latin typeface="Aptos"/>
+              </a:rPr>
+              <a:t>Taken straight from the curriculum plan.</a:t>
+            </a:r>
+          </a:p>
+        </p:txBody>
+      </p:sp>
+      <p:sp>
+        <p:nvSpPr>
+          <p:cNvPr id="8" name="TextBox 7"/>
+          <p:cNvSpPr txBox="1"/>
+          <p:nvPr/>
+        </p:nvSpPr>
+        <p:spPr>
+          <a:xfrm>
+            <a:off x="411480" y="6519672"/>
+            <a:ext cx="5303520" cy="164592"/>
+          </a:xfrm>
+          <a:prstGeom prst="rect">
+            <a:avLst/>
+          </a:prstGeom>
+          <a:noFill/>
+        </p:spPr>
+        <p:txBody>
+          <a:bodyPr wrap="square" anchor="t">
+            <a:spAutoFit/>
+          </a:bodyPr>
+          <a:lstStyle/>
+          <a:p>
+            <a:r>
+              <a:rPr sz="850" b="0">
+                <a:solidFill>
+                  <a:srgbClr val="56657B"/>
+                </a:solidFill>
+                <a:latin typeface="Aptos"/>
+              </a:rPr>
+              <a:t>AI Builders Academy | Week 1</a:t>
+            </a:r>
+          </a:p>
+        </p:txBody>
+      </p:sp>
+      <p:sp>
+        <p:nvSpPr>
+          <p:cNvPr id="9" name="TextBox 8"/>
+          <p:cNvSpPr txBox="1"/>
+          <p:nvPr/>
+        </p:nvSpPr>
+        <p:spPr>
+          <a:xfrm>
+            <a:off x="10972800" y="6519672"/>
+            <a:ext cx="822960" cy="164592"/>
+          </a:xfrm>
+          <a:prstGeom prst="rect">
+            <a:avLst/>
+          </a:prstGeom>
+          <a:noFill/>
+        </p:spPr>
+        <p:txBody>
+          <a:bodyPr wrap="square" anchor="t">
+            <a:spAutoFit/>
+          </a:bodyPr>
+          <a:lstStyle/>
+          <a:p>
+            <a:pPr algn="r"/>
+            <a:r>
+              <a:rPr sz="850" b="0">
+                <a:solidFill>
+                  <a:srgbClr val="56657B"/>
+                </a:solidFill>
+                <a:latin typeface="Aptos"/>
+              </a:rPr>
+              <a:t>2/9</a:t>
+            </a:r>
+          </a:p>
+        </p:txBody>
+      </p:sp>
+      <p:sp>
+        <p:nvSpPr>
+          <p:cNvPr id="10" name="Rounded Rectangle 9"/>
           <p:cNvSpPr/>
           <p:nvPr/>
         </p:nvSpPr>
         <p:spPr>
           <a:xfrm>
-            <a:off x="411480" y="877824"/>
-            <a:ext cx="2743200" cy="1051560"/>
+            <a:off x="777240" y="1874519"/>
+            <a:ext cx="3383280" cy="1508760"/>
           </a:xfrm>
           <a:prstGeom prst="roundRect">
             <a:avLst/>
@@ -3291,14 +3758,14 @@
       </p:sp>
       <p:sp>
         <p:nvSpPr>
-          <p:cNvPr id="7" name="Rectangle 6"/>
+          <p:cNvPr id="11" name="Rectangle 10"/>
           <p:cNvSpPr/>
           <p:nvPr/>
         </p:nvSpPr>
         <p:spPr>
           <a:xfrm>
-            <a:off x="411480" y="877824"/>
-            <a:ext cx="73152" cy="1051560"/>
+            <a:off x="777240" y="1874519"/>
+            <a:ext cx="73152" cy="1508760"/>
           </a:xfrm>
           <a:prstGeom prst="rect">
             <a:avLst/>
@@ -3336,14 +3803,835 @@
       </p:sp>
       <p:sp>
         <p:nvSpPr>
+          <p:cNvPr id="12" name="TextBox 11"/>
+          <p:cNvSpPr txBox="1"/>
+          <p:nvPr/>
+        </p:nvSpPr>
+        <p:spPr>
+          <a:xfrm>
+            <a:off x="941832" y="2002536"/>
+            <a:ext cx="3063240" cy="219456"/>
+          </a:xfrm>
+          <a:prstGeom prst="rect">
+            <a:avLst/>
+          </a:prstGeom>
+          <a:noFill/>
+        </p:spPr>
+        <p:txBody>
+          <a:bodyPr wrap="square" anchor="t">
+            <a:spAutoFit/>
+          </a:bodyPr>
+          <a:lstStyle/>
+          <a:p>
+            <a:r>
+              <a:rPr sz="1300" b="1">
+                <a:solidFill>
+                  <a:srgbClr val="2563EB"/>
+                </a:solidFill>
+                <a:latin typeface="Aptos"/>
+              </a:rPr>
+              <a:t>Main goal</a:t>
+            </a:r>
+          </a:p>
+        </p:txBody>
+      </p:sp>
+      <p:sp>
+        <p:nvSpPr>
+          <p:cNvPr id="13" name="TextBox 12"/>
+          <p:cNvSpPr txBox="1"/>
+          <p:nvPr/>
+        </p:nvSpPr>
+        <p:spPr>
+          <a:xfrm>
+            <a:off x="941832" y="2313432"/>
+            <a:ext cx="3054096" cy="1005839"/>
+          </a:xfrm>
+          <a:prstGeom prst="rect">
+            <a:avLst/>
+          </a:prstGeom>
+          <a:noFill/>
+        </p:spPr>
+        <p:txBody>
+          <a:bodyPr wrap="square" anchor="t">
+            <a:spAutoFit/>
+          </a:bodyPr>
+          <a:lstStyle/>
+          <a:p>
+            <a:r>
+              <a:rPr sz="1400" b="0">
+                <a:solidFill>
+                  <a:srgbClr val="172033"/>
+                </a:solidFill>
+                <a:latin typeface="Aptos"/>
+              </a:rPr>
+              <a:t>Move students from simply asking AI questions to designing a useful personal assistant.</a:t>
+            </a:r>
+          </a:p>
+        </p:txBody>
+      </p:sp>
+      <p:sp>
+        <p:nvSpPr>
+          <p:cNvPr id="14" name="Rounded Rectangle 13"/>
+          <p:cNvSpPr/>
+          <p:nvPr/>
+        </p:nvSpPr>
+        <p:spPr>
+          <a:xfrm>
+            <a:off x="4389120" y="1874519"/>
+            <a:ext cx="3108960" cy="1508760"/>
+          </a:xfrm>
+          <a:prstGeom prst="roundRect">
+            <a:avLst/>
+          </a:prstGeom>
+          <a:solidFill>
+            <a:srgbClr val="ECFDF5"/>
+          </a:solidFill>
+          <a:ln>
+            <a:solidFill>
+              <a:srgbClr val="D9E2EE"/>
+            </a:solidFill>
+          </a:ln>
+        </p:spPr>
+        <p:style>
+          <a:lnRef idx="1">
+            <a:schemeClr val="accent1"/>
+          </a:lnRef>
+          <a:fillRef idx="3">
+            <a:schemeClr val="accent1"/>
+          </a:fillRef>
+          <a:effectRef idx="2">
+            <a:schemeClr val="accent1"/>
+          </a:effectRef>
+          <a:fontRef idx="minor">
+            <a:schemeClr val="lt1"/>
+          </a:fontRef>
+        </p:style>
+        <p:txBody>
+          <a:bodyPr rtlCol="0" anchor="ctr"/>
+          <a:lstStyle/>
+          <a:p>
+            <a:pPr algn="ctr"/>
+          </a:p>
+        </p:txBody>
+      </p:sp>
+      <p:sp>
+        <p:nvSpPr>
+          <p:cNvPr id="15" name="Rectangle 14"/>
+          <p:cNvSpPr/>
+          <p:nvPr/>
+        </p:nvSpPr>
+        <p:spPr>
+          <a:xfrm>
+            <a:off x="4389120" y="1874519"/>
+            <a:ext cx="73152" cy="1508760"/>
+          </a:xfrm>
+          <a:prstGeom prst="rect">
+            <a:avLst/>
+          </a:prstGeom>
+          <a:solidFill>
+            <a:srgbClr val="0F9F6E"/>
+          </a:solidFill>
+          <a:ln>
+            <a:solidFill>
+              <a:srgbClr val="0F9F6E"/>
+            </a:solidFill>
+          </a:ln>
+        </p:spPr>
+        <p:style>
+          <a:lnRef idx="1">
+            <a:schemeClr val="accent1"/>
+          </a:lnRef>
+          <a:fillRef idx="3">
+            <a:schemeClr val="accent1"/>
+          </a:fillRef>
+          <a:effectRef idx="2">
+            <a:schemeClr val="accent1"/>
+          </a:effectRef>
+          <a:fontRef idx="minor">
+            <a:schemeClr val="lt1"/>
+          </a:fontRef>
+        </p:style>
+        <p:txBody>
+          <a:bodyPr rtlCol="0" anchor="ctr"/>
+          <a:lstStyle/>
+          <a:p>
+            <a:pPr algn="ctr"/>
+          </a:p>
+        </p:txBody>
+      </p:sp>
+      <p:sp>
+        <p:nvSpPr>
+          <p:cNvPr id="16" name="TextBox 15"/>
+          <p:cNvSpPr txBox="1"/>
+          <p:nvPr/>
+        </p:nvSpPr>
+        <p:spPr>
+          <a:xfrm>
+            <a:off x="4553712" y="2002536"/>
+            <a:ext cx="2788920" cy="219456"/>
+          </a:xfrm>
+          <a:prstGeom prst="rect">
+            <a:avLst/>
+          </a:prstGeom>
+          <a:noFill/>
+        </p:spPr>
+        <p:txBody>
+          <a:bodyPr wrap="square" anchor="t">
+            <a:spAutoFit/>
+          </a:bodyPr>
+          <a:lstStyle/>
+          <a:p>
+            <a:r>
+              <a:rPr sz="1300" b="1">
+                <a:solidFill>
+                  <a:srgbClr val="0F9F6E"/>
+                </a:solidFill>
+                <a:latin typeface="Aptos"/>
+              </a:rPr>
+              <a:t>Student deliverable</a:t>
+            </a:r>
+          </a:p>
+        </p:txBody>
+      </p:sp>
+      <p:sp>
+        <p:nvSpPr>
+          <p:cNvPr id="17" name="TextBox 16"/>
+          <p:cNvSpPr txBox="1"/>
+          <p:nvPr/>
+        </p:nvSpPr>
+        <p:spPr>
+          <a:xfrm>
+            <a:off x="4553712" y="2313432"/>
+            <a:ext cx="2779776" cy="1005839"/>
+          </a:xfrm>
+          <a:prstGeom prst="rect">
+            <a:avLst/>
+          </a:prstGeom>
+          <a:noFill/>
+        </p:spPr>
+        <p:txBody>
+          <a:bodyPr wrap="square" anchor="t">
+            <a:spAutoFit/>
+          </a:bodyPr>
+          <a:lstStyle/>
+          <a:p>
+            <a:r>
+              <a:rPr sz="1400" b="0">
+                <a:solidFill>
+                  <a:srgbClr val="172033"/>
+                </a:solidFill>
+                <a:latin typeface="Aptos"/>
+              </a:rPr>
+              <a:t>AI Assistant with 5 example conversations.</a:t>
+            </a:r>
+          </a:p>
+        </p:txBody>
+      </p:sp>
+      <p:sp>
+        <p:nvSpPr>
+          <p:cNvPr id="18" name="Rounded Rectangle 17"/>
+          <p:cNvSpPr/>
+          <p:nvPr/>
+        </p:nvSpPr>
+        <p:spPr>
+          <a:xfrm>
+            <a:off x="7726679" y="1874519"/>
+            <a:ext cx="3611880" cy="1508760"/>
+          </a:xfrm>
+          <a:prstGeom prst="roundRect">
+            <a:avLst/>
+          </a:prstGeom>
+          <a:solidFill>
+            <a:srgbClr val="F5F3FF"/>
+          </a:solidFill>
+          <a:ln>
+            <a:solidFill>
+              <a:srgbClr val="D9E2EE"/>
+            </a:solidFill>
+          </a:ln>
+        </p:spPr>
+        <p:style>
+          <a:lnRef idx="1">
+            <a:schemeClr val="accent1"/>
+          </a:lnRef>
+          <a:fillRef idx="3">
+            <a:schemeClr val="accent1"/>
+          </a:fillRef>
+          <a:effectRef idx="2">
+            <a:schemeClr val="accent1"/>
+          </a:effectRef>
+          <a:fontRef idx="minor">
+            <a:schemeClr val="lt1"/>
+          </a:fontRef>
+        </p:style>
+        <p:txBody>
+          <a:bodyPr rtlCol="0" anchor="ctr"/>
+          <a:lstStyle/>
+          <a:p>
+            <a:pPr algn="ctr"/>
+          </a:p>
+        </p:txBody>
+      </p:sp>
+      <p:sp>
+        <p:nvSpPr>
+          <p:cNvPr id="19" name="Rectangle 18"/>
+          <p:cNvSpPr/>
+          <p:nvPr/>
+        </p:nvSpPr>
+        <p:spPr>
+          <a:xfrm>
+            <a:off x="7726679" y="1874519"/>
+            <a:ext cx="73152" cy="1508760"/>
+          </a:xfrm>
+          <a:prstGeom prst="rect">
+            <a:avLst/>
+          </a:prstGeom>
+          <a:solidFill>
+            <a:srgbClr val="7C3AED"/>
+          </a:solidFill>
+          <a:ln>
+            <a:solidFill>
+              <a:srgbClr val="7C3AED"/>
+            </a:solidFill>
+          </a:ln>
+        </p:spPr>
+        <p:style>
+          <a:lnRef idx="1">
+            <a:schemeClr val="accent1"/>
+          </a:lnRef>
+          <a:fillRef idx="3">
+            <a:schemeClr val="accent1"/>
+          </a:fillRef>
+          <a:effectRef idx="2">
+            <a:schemeClr val="accent1"/>
+          </a:effectRef>
+          <a:fontRef idx="minor">
+            <a:schemeClr val="lt1"/>
+          </a:fontRef>
+        </p:style>
+        <p:txBody>
+          <a:bodyPr rtlCol="0" anchor="ctr"/>
+          <a:lstStyle/>
+          <a:p>
+            <a:pPr algn="ctr"/>
+          </a:p>
+        </p:txBody>
+      </p:sp>
+      <p:sp>
+        <p:nvSpPr>
+          <p:cNvPr id="20" name="TextBox 19"/>
+          <p:cNvSpPr txBox="1"/>
+          <p:nvPr/>
+        </p:nvSpPr>
+        <p:spPr>
+          <a:xfrm>
+            <a:off x="7891271" y="2002536"/>
+            <a:ext cx="3291840" cy="219456"/>
+          </a:xfrm>
+          <a:prstGeom prst="rect">
+            <a:avLst/>
+          </a:prstGeom>
+          <a:noFill/>
+        </p:spPr>
+        <p:txBody>
+          <a:bodyPr wrap="square" anchor="t">
+            <a:spAutoFit/>
+          </a:bodyPr>
+          <a:lstStyle/>
+          <a:p>
+            <a:r>
+              <a:rPr sz="1300" b="1">
+                <a:solidFill>
+                  <a:srgbClr val="7C3AED"/>
+                </a:solidFill>
+                <a:latin typeface="Aptos"/>
+              </a:rPr>
+              <a:t>Tools today</a:t>
+            </a:r>
+          </a:p>
+        </p:txBody>
+      </p:sp>
+      <p:sp>
+        <p:nvSpPr>
+          <p:cNvPr id="21" name="TextBox 20"/>
+          <p:cNvSpPr txBox="1"/>
+          <p:nvPr/>
+        </p:nvSpPr>
+        <p:spPr>
+          <a:xfrm>
+            <a:off x="7927848" y="2313432"/>
+            <a:ext cx="3227832" cy="1005839"/>
+          </a:xfrm>
+          <a:prstGeom prst="rect">
+            <a:avLst/>
+          </a:prstGeom>
+          <a:noFill/>
+        </p:spPr>
+        <p:txBody>
+          <a:bodyPr wrap="square">
+            <a:spAutoFit/>
+          </a:bodyPr>
+          <a:lstStyle/>
+          <a:p>
+            <a:pPr>
+              <a:spcAft>
+                <a:spcPts val="900"/>
+              </a:spcAft>
+              <a:defRPr sz="1400">
+                <a:solidFill>
+                  <a:srgbClr val="172033"/>
+                </a:solidFill>
+                <a:latin typeface="Aptos"/>
+              </a:defRPr>
+            </a:pPr>
+            <a:r>
+              <a:t>ChatGPT</a:t>
+            </a:r>
+          </a:p>
+          <a:p>
+            <a:pPr>
+              <a:spcAft>
+                <a:spcPts val="900"/>
+              </a:spcAft>
+              <a:defRPr sz="1400">
+                <a:solidFill>
+                  <a:srgbClr val="172033"/>
+                </a:solidFill>
+                <a:latin typeface="Aptos"/>
+              </a:defRPr>
+            </a:pPr>
+            <a:r>
+              <a:t>Prompt Engineering</a:t>
+            </a:r>
+          </a:p>
+          <a:p>
+            <a:pPr>
+              <a:spcAft>
+                <a:spcPts val="900"/>
+              </a:spcAft>
+              <a:defRPr sz="1400">
+                <a:solidFill>
+                  <a:srgbClr val="172033"/>
+                </a:solidFill>
+                <a:latin typeface="Aptos"/>
+              </a:defRPr>
+            </a:pPr>
+            <a:r>
+              <a:t>Role + Task + Context + Format</a:t>
+            </a:r>
+          </a:p>
+        </p:txBody>
+      </p:sp>
+      <p:sp>
+        <p:nvSpPr>
+          <p:cNvPr id="22" name="Rounded Rectangle 21"/>
+          <p:cNvSpPr/>
+          <p:nvPr/>
+        </p:nvSpPr>
+        <p:spPr>
+          <a:xfrm>
+            <a:off x="1051560" y="4069080"/>
+            <a:ext cx="9875520" cy="914400"/>
+          </a:xfrm>
+          <a:prstGeom prst="roundRect">
+            <a:avLst/>
+          </a:prstGeom>
+          <a:solidFill>
+            <a:srgbClr val="FFF7ED"/>
+          </a:solidFill>
+          <a:ln>
+            <a:solidFill>
+              <a:srgbClr val="D9E2EE"/>
+            </a:solidFill>
+          </a:ln>
+        </p:spPr>
+        <p:style>
+          <a:lnRef idx="1">
+            <a:schemeClr val="accent1"/>
+          </a:lnRef>
+          <a:fillRef idx="3">
+            <a:schemeClr val="accent1"/>
+          </a:fillRef>
+          <a:effectRef idx="2">
+            <a:schemeClr val="accent1"/>
+          </a:effectRef>
+          <a:fontRef idx="minor">
+            <a:schemeClr val="lt1"/>
+          </a:fontRef>
+        </p:style>
+        <p:txBody>
+          <a:bodyPr rtlCol="0" anchor="ctr"/>
+          <a:lstStyle/>
+          <a:p>
+            <a:pPr algn="ctr"/>
+          </a:p>
+        </p:txBody>
+      </p:sp>
+      <p:sp>
+        <p:nvSpPr>
+          <p:cNvPr id="23" name="Rectangle 22"/>
+          <p:cNvSpPr/>
+          <p:nvPr/>
+        </p:nvSpPr>
+        <p:spPr>
+          <a:xfrm>
+            <a:off x="1051560" y="4069080"/>
+            <a:ext cx="73152" cy="914400"/>
+          </a:xfrm>
+          <a:prstGeom prst="rect">
+            <a:avLst/>
+          </a:prstGeom>
+          <a:solidFill>
+            <a:srgbClr val="F97316"/>
+          </a:solidFill>
+          <a:ln>
+            <a:solidFill>
+              <a:srgbClr val="F97316"/>
+            </a:solidFill>
+          </a:ln>
+        </p:spPr>
+        <p:style>
+          <a:lnRef idx="1">
+            <a:schemeClr val="accent1"/>
+          </a:lnRef>
+          <a:fillRef idx="3">
+            <a:schemeClr val="accent1"/>
+          </a:fillRef>
+          <a:effectRef idx="2">
+            <a:schemeClr val="accent1"/>
+          </a:effectRef>
+          <a:fontRef idx="minor">
+            <a:schemeClr val="lt1"/>
+          </a:fontRef>
+        </p:style>
+        <p:txBody>
+          <a:bodyPr rtlCol="0" anchor="ctr"/>
+          <a:lstStyle/>
+          <a:p>
+            <a:pPr algn="ctr"/>
+          </a:p>
+        </p:txBody>
+      </p:sp>
+      <p:sp>
+        <p:nvSpPr>
+          <p:cNvPr id="24" name="TextBox 23"/>
+          <p:cNvSpPr txBox="1"/>
+          <p:nvPr/>
+        </p:nvSpPr>
+        <p:spPr>
+          <a:xfrm>
+            <a:off x="1216151" y="4197096"/>
+            <a:ext cx="9555480" cy="219456"/>
+          </a:xfrm>
+          <a:prstGeom prst="rect">
+            <a:avLst/>
+          </a:prstGeom>
+          <a:noFill/>
+        </p:spPr>
+        <p:txBody>
+          <a:bodyPr wrap="square" anchor="t">
+            <a:spAutoFit/>
+          </a:bodyPr>
+          <a:lstStyle/>
+          <a:p>
+            <a:r>
+              <a:rPr sz="1300" b="1">
+                <a:solidFill>
+                  <a:srgbClr val="F97316"/>
+                </a:solidFill>
+                <a:latin typeface="Aptos"/>
+              </a:rPr>
+              <a:t>Tutor framing</a:t>
+            </a:r>
+          </a:p>
+        </p:txBody>
+      </p:sp>
+      <p:sp>
+        <p:nvSpPr>
+          <p:cNvPr id="25" name="TextBox 24"/>
+          <p:cNvSpPr txBox="1"/>
+          <p:nvPr/>
+        </p:nvSpPr>
+        <p:spPr>
+          <a:xfrm>
+            <a:off x="1216151" y="4507992"/>
+            <a:ext cx="9546336" cy="411479"/>
+          </a:xfrm>
+          <a:prstGeom prst="rect">
+            <a:avLst/>
+          </a:prstGeom>
+          <a:noFill/>
+        </p:spPr>
+        <p:txBody>
+          <a:bodyPr wrap="square" anchor="t">
+            <a:spAutoFit/>
+          </a:bodyPr>
+          <a:lstStyle/>
+          <a:p>
+            <a:r>
+              <a:rPr sz="1400" b="0">
+                <a:solidFill>
+                  <a:srgbClr val="172033"/>
+                </a:solidFill>
+                <a:latin typeface="Aptos"/>
+              </a:rPr>
+              <a:t>Every tool is introduced as a practical building tool, not abstract theory.</a:t>
+            </a:r>
+          </a:p>
+        </p:txBody>
+      </p:sp>
+    </p:spTree>
+  </p:cSld>
+  <p:clrMapOvr>
+    <a:masterClrMapping/>
+  </p:clrMapOvr>
+</p:sld>
+</file>
+
+<file path=ppt/slides/slide3.xml><?xml version="1.0" encoding="utf-8"?>
+<p:sld xmlns:a="http://schemas.openxmlformats.org/drawingml/2006/main" xmlns:p="http://schemas.openxmlformats.org/presentationml/2006/main" xmlns:r="http://schemas.openxmlformats.org/officeDocument/2006/relationships">
+  <p:cSld>
+    <p:bg>
+      <p:bgPr>
+        <a:solidFill>
+          <a:srgbClr val="F4F7FB"/>
+        </a:solidFill>
+        <a:effectLst/>
+      </p:bgPr>
+    </p:bg>
+    <p:spTree>
+      <p:nvGrpSpPr>
+        <p:cNvPr id="1" name=""/>
+        <p:cNvGrpSpPr/>
+        <p:nvPr/>
+      </p:nvGrpSpPr>
+      <p:grpSpPr/>
+      <p:sp>
+        <p:nvSpPr>
+          <p:cNvPr id="2" name="Rectangle 1"/>
+          <p:cNvSpPr/>
+          <p:nvPr/>
+        </p:nvSpPr>
+        <p:spPr>
+          <a:xfrm>
+            <a:off x="0" y="0"/>
+            <a:ext cx="12191695" cy="658368"/>
+          </a:xfrm>
+          <a:prstGeom prst="rect">
+            <a:avLst/>
+          </a:prstGeom>
+          <a:solidFill>
+            <a:srgbClr val="2563EB"/>
+          </a:solidFill>
+          <a:ln>
+            <a:solidFill>
+              <a:srgbClr val="2563EB"/>
+            </a:solidFill>
+          </a:ln>
+        </p:spPr>
+        <p:style>
+          <a:lnRef idx="1">
+            <a:schemeClr val="accent1"/>
+          </a:lnRef>
+          <a:fillRef idx="3">
+            <a:schemeClr val="accent1"/>
+          </a:fillRef>
+          <a:effectRef idx="2">
+            <a:schemeClr val="accent1"/>
+          </a:effectRef>
+          <a:fontRef idx="minor">
+            <a:schemeClr val="lt1"/>
+          </a:fontRef>
+        </p:style>
+        <p:txBody>
+          <a:bodyPr rtlCol="0" anchor="ctr"/>
+          <a:lstStyle/>
+          <a:p>
+            <a:pPr algn="ctr"/>
+          </a:p>
+        </p:txBody>
+      </p:sp>
+      <p:sp>
+        <p:nvSpPr>
+          <p:cNvPr id="3" name="TextBox 2"/>
+          <p:cNvSpPr txBox="1"/>
+          <p:nvPr/>
+        </p:nvSpPr>
+        <p:spPr>
+          <a:xfrm>
+            <a:off x="502920" y="164592"/>
+            <a:ext cx="1143000" cy="201168"/>
+          </a:xfrm>
+          <a:prstGeom prst="rect">
+            <a:avLst/>
+          </a:prstGeom>
+          <a:noFill/>
+        </p:spPr>
+        <p:txBody>
+          <a:bodyPr wrap="square" anchor="t">
+            <a:spAutoFit/>
+          </a:bodyPr>
+          <a:lstStyle/>
+          <a:p>
+            <a:r>
+              <a:rPr sz="1100" b="1">
+                <a:solidFill>
+                  <a:srgbClr val="FFFFFF"/>
+                </a:solidFill>
+                <a:latin typeface="Aptos"/>
+              </a:rPr>
+              <a:t>WEEK 1</a:t>
+            </a:r>
+          </a:p>
+        </p:txBody>
+      </p:sp>
+      <p:sp>
+        <p:nvSpPr>
+          <p:cNvPr id="4" name="TextBox 3"/>
+          <p:cNvSpPr txBox="1"/>
+          <p:nvPr/>
+        </p:nvSpPr>
+        <p:spPr>
+          <a:xfrm>
+            <a:off x="1572768" y="109728"/>
+            <a:ext cx="6492240" cy="320040"/>
+          </a:xfrm>
+          <a:prstGeom prst="rect">
+            <a:avLst/>
+          </a:prstGeom>
+          <a:noFill/>
+        </p:spPr>
+        <p:txBody>
+          <a:bodyPr wrap="square" anchor="t">
+            <a:spAutoFit/>
+          </a:bodyPr>
+          <a:lstStyle/>
+          <a:p>
+            <a:r>
+              <a:rPr sz="2000" b="1">
+                <a:solidFill>
+                  <a:srgbClr val="FFFFFF"/>
+                </a:solidFill>
+                <a:latin typeface="Aptos"/>
+              </a:rPr>
+              <a:t>Meet Your AI Teammate</a:t>
+            </a:r>
+          </a:p>
+        </p:txBody>
+      </p:sp>
+      <p:sp>
+        <p:nvSpPr>
+          <p:cNvPr id="5" name="TextBox 4"/>
+          <p:cNvSpPr txBox="1"/>
+          <p:nvPr/>
+        </p:nvSpPr>
+        <p:spPr>
+          <a:xfrm>
+            <a:off x="7909560" y="173736"/>
+            <a:ext cx="3749039" cy="182880"/>
+          </a:xfrm>
+          <a:prstGeom prst="rect">
+            <a:avLst/>
+          </a:prstGeom>
+          <a:noFill/>
+        </p:spPr>
+        <p:txBody>
+          <a:bodyPr wrap="square" anchor="t">
+            <a:spAutoFit/>
+          </a:bodyPr>
+          <a:lstStyle/>
+          <a:p>
+            <a:pPr algn="r"/>
+            <a:r>
+              <a:rPr sz="1050" b="0">
+                <a:solidFill>
+                  <a:srgbClr val="FFFFFF"/>
+                </a:solidFill>
+                <a:latin typeface="Aptos"/>
+              </a:rPr>
+              <a:t>ChatGPT Basics</a:t>
+            </a:r>
+          </a:p>
+        </p:txBody>
+      </p:sp>
+      <p:sp>
+        <p:nvSpPr>
+          <p:cNvPr id="6" name="TextBox 5"/>
+          <p:cNvSpPr txBox="1"/>
+          <p:nvPr/>
+        </p:nvSpPr>
+        <p:spPr>
+          <a:xfrm>
+            <a:off x="658368" y="932688"/>
+            <a:ext cx="10698480" cy="475488"/>
+          </a:xfrm>
+          <a:prstGeom prst="rect">
+            <a:avLst/>
+          </a:prstGeom>
+          <a:noFill/>
+        </p:spPr>
+        <p:txBody>
+          <a:bodyPr wrap="square" anchor="t">
+            <a:spAutoFit/>
+          </a:bodyPr>
+          <a:lstStyle/>
+          <a:p>
+            <a:r>
+              <a:rPr sz="3100" b="1">
+                <a:solidFill>
+                  <a:srgbClr val="172033"/>
+                </a:solidFill>
+                <a:latin typeface="Aptos"/>
+              </a:rPr>
+              <a:t>Hook</a:t>
+            </a:r>
+          </a:p>
+        </p:txBody>
+      </p:sp>
+      <p:sp>
+        <p:nvSpPr>
+          <p:cNvPr id="7" name="TextBox 6"/>
+          <p:cNvSpPr txBox="1"/>
+          <p:nvPr/>
+        </p:nvSpPr>
+        <p:spPr>
+          <a:xfrm>
+            <a:off x="694944" y="1481328"/>
+            <a:ext cx="10424160" cy="256032"/>
+          </a:xfrm>
+          <a:prstGeom prst="rect">
+            <a:avLst/>
+          </a:prstGeom>
+          <a:noFill/>
+        </p:spPr>
+        <p:txBody>
+          <a:bodyPr wrap="square" anchor="t">
+            <a:spAutoFit/>
+          </a:bodyPr>
+          <a:lstStyle/>
+          <a:p>
+            <a:r>
+              <a:rPr sz="1500" b="0">
+                <a:solidFill>
+                  <a:srgbClr val="56657B"/>
+                </a:solidFill>
+                <a:latin typeface="Aptos"/>
+              </a:rPr>
+              <a:t>Start with a question that makes students curious immediately.</a:t>
+            </a:r>
+          </a:p>
+        </p:txBody>
+      </p:sp>
+      <p:sp>
+        <p:nvSpPr>
           <p:cNvPr id="8" name="TextBox 7"/>
           <p:cNvSpPr txBox="1"/>
           <p:nvPr/>
         </p:nvSpPr>
         <p:spPr>
           <a:xfrm>
-            <a:off x="576072" y="996695"/>
-            <a:ext cx="2432304" cy="219456"/>
+            <a:off x="411480" y="6519672"/>
+            <a:ext cx="5303520" cy="164592"/>
           </a:xfrm>
           <a:prstGeom prst="rect">
             <a:avLst/>
@@ -3357,13 +4645,430 @@
           <a:lstStyle/>
           <a:p>
             <a:r>
-              <a:rPr sz="1300" b="1">
+              <a:rPr sz="850" b="0">
+                <a:solidFill>
+                  <a:srgbClr val="56657B"/>
+                </a:solidFill>
+                <a:latin typeface="Aptos"/>
+              </a:rPr>
+              <a:t>AI Builders Academy | Week 1</a:t>
+            </a:r>
+          </a:p>
+        </p:txBody>
+      </p:sp>
+      <p:sp>
+        <p:nvSpPr>
+          <p:cNvPr id="9" name="TextBox 8"/>
+          <p:cNvSpPr txBox="1"/>
+          <p:nvPr/>
+        </p:nvSpPr>
+        <p:spPr>
+          <a:xfrm>
+            <a:off x="10972800" y="6519672"/>
+            <a:ext cx="822960" cy="164592"/>
+          </a:xfrm>
+          <a:prstGeom prst="rect">
+            <a:avLst/>
+          </a:prstGeom>
+          <a:noFill/>
+        </p:spPr>
+        <p:txBody>
+          <a:bodyPr wrap="square" anchor="t">
+            <a:spAutoFit/>
+          </a:bodyPr>
+          <a:lstStyle/>
+          <a:p>
+            <a:pPr algn="r"/>
+            <a:r>
+              <a:rPr sz="850" b="0">
+                <a:solidFill>
+                  <a:srgbClr val="56657B"/>
+                </a:solidFill>
+                <a:latin typeface="Aptos"/>
+              </a:rPr>
+              <a:t>3/9</a:t>
+            </a:r>
+          </a:p>
+        </p:txBody>
+      </p:sp>
+      <p:sp>
+        <p:nvSpPr>
+          <p:cNvPr id="10" name="TextBox 9"/>
+          <p:cNvSpPr txBox="1"/>
+          <p:nvPr/>
+        </p:nvSpPr>
+        <p:spPr>
+          <a:xfrm>
+            <a:off x="868680" y="1874519"/>
+            <a:ext cx="10424160" cy="960120"/>
+          </a:xfrm>
+          <a:prstGeom prst="rect">
+            <a:avLst/>
+          </a:prstGeom>
+          <a:noFill/>
+        </p:spPr>
+        <p:txBody>
+          <a:bodyPr wrap="square" anchor="t">
+            <a:spAutoFit/>
+          </a:bodyPr>
+          <a:lstStyle/>
+          <a:p>
+            <a:pPr algn="ctr"/>
+            <a:r>
+              <a:rPr sz="4800" b="1">
                 <a:solidFill>
                   <a:srgbClr val="2563EB"/>
                 </a:solidFill>
                 <a:latin typeface="Aptos"/>
               </a:rPr>
-              <a:t>Goal</a:t>
+              <a:t>Can AI do my homework?</a:t>
+            </a:r>
+          </a:p>
+        </p:txBody>
+      </p:sp>
+      <p:sp>
+        <p:nvSpPr>
+          <p:cNvPr id="11" name="TextBox 10"/>
+          <p:cNvSpPr txBox="1"/>
+          <p:nvPr/>
+        </p:nvSpPr>
+        <p:spPr>
+          <a:xfrm>
+            <a:off x="1234440" y="3657600"/>
+            <a:ext cx="9692640" cy="1234440"/>
+          </a:xfrm>
+          <a:prstGeom prst="rect">
+            <a:avLst/>
+          </a:prstGeom>
+          <a:noFill/>
+        </p:spPr>
+        <p:txBody>
+          <a:bodyPr wrap="square">
+            <a:spAutoFit/>
+          </a:bodyPr>
+          <a:lstStyle/>
+          <a:p>
+            <a:pPr>
+              <a:spcAft>
+                <a:spcPts val="900"/>
+              </a:spcAft>
+              <a:defRPr sz="2300">
+                <a:solidFill>
+                  <a:srgbClr val="172033"/>
+                </a:solidFill>
+                <a:latin typeface="Aptos"/>
+              </a:defRPr>
+            </a:pPr>
+            <a:r>
+              <a:t>Ask for quick predictions.</a:t>
+            </a:r>
+          </a:p>
+          <a:p>
+            <a:pPr>
+              <a:spcAft>
+                <a:spcPts val="900"/>
+              </a:spcAft>
+              <a:defRPr sz="2300">
+                <a:solidFill>
+                  <a:srgbClr val="172033"/>
+                </a:solidFill>
+                <a:latin typeface="Aptos"/>
+              </a:defRPr>
+            </a:pPr>
+            <a:r>
+              <a:t>Let students argue both sides.</a:t>
+            </a:r>
+          </a:p>
+          <a:p>
+            <a:pPr>
+              <a:spcAft>
+                <a:spcPts val="900"/>
+              </a:spcAft>
+              <a:defRPr sz="2300">
+                <a:solidFill>
+                  <a:srgbClr val="172033"/>
+                </a:solidFill>
+                <a:latin typeface="Aptos"/>
+              </a:defRPr>
+            </a:pPr>
+            <a:r>
+              <a:t>Then show the demo before explaining too much.</a:t>
+            </a:r>
+          </a:p>
+        </p:txBody>
+      </p:sp>
+    </p:spTree>
+  </p:cSld>
+  <p:clrMapOvr>
+    <a:masterClrMapping/>
+  </p:clrMapOvr>
+</p:sld>
+</file>
+
+<file path=ppt/slides/slide4.xml><?xml version="1.0" encoding="utf-8"?>
+<p:sld xmlns:a="http://schemas.openxmlformats.org/drawingml/2006/main" xmlns:p="http://schemas.openxmlformats.org/presentationml/2006/main" xmlns:r="http://schemas.openxmlformats.org/officeDocument/2006/relationships">
+  <p:cSld>
+    <p:bg>
+      <p:bgPr>
+        <a:solidFill>
+          <a:srgbClr val="F4F7FB"/>
+        </a:solidFill>
+        <a:effectLst/>
+      </p:bgPr>
+    </p:bg>
+    <p:spTree>
+      <p:nvGrpSpPr>
+        <p:cNvPr id="1" name=""/>
+        <p:cNvGrpSpPr/>
+        <p:nvPr/>
+      </p:nvGrpSpPr>
+      <p:grpSpPr/>
+      <p:sp>
+        <p:nvSpPr>
+          <p:cNvPr id="2" name="Rectangle 1"/>
+          <p:cNvSpPr/>
+          <p:nvPr/>
+        </p:nvSpPr>
+        <p:spPr>
+          <a:xfrm>
+            <a:off x="0" y="0"/>
+            <a:ext cx="12191695" cy="658368"/>
+          </a:xfrm>
+          <a:prstGeom prst="rect">
+            <a:avLst/>
+          </a:prstGeom>
+          <a:solidFill>
+            <a:srgbClr val="2563EB"/>
+          </a:solidFill>
+          <a:ln>
+            <a:solidFill>
+              <a:srgbClr val="2563EB"/>
+            </a:solidFill>
+          </a:ln>
+        </p:spPr>
+        <p:style>
+          <a:lnRef idx="1">
+            <a:schemeClr val="accent1"/>
+          </a:lnRef>
+          <a:fillRef idx="3">
+            <a:schemeClr val="accent1"/>
+          </a:fillRef>
+          <a:effectRef idx="2">
+            <a:schemeClr val="accent1"/>
+          </a:effectRef>
+          <a:fontRef idx="minor">
+            <a:schemeClr val="lt1"/>
+          </a:fontRef>
+        </p:style>
+        <p:txBody>
+          <a:bodyPr rtlCol="0" anchor="ctr"/>
+          <a:lstStyle/>
+          <a:p>
+            <a:pPr algn="ctr"/>
+          </a:p>
+        </p:txBody>
+      </p:sp>
+      <p:sp>
+        <p:nvSpPr>
+          <p:cNvPr id="3" name="TextBox 2"/>
+          <p:cNvSpPr txBox="1"/>
+          <p:nvPr/>
+        </p:nvSpPr>
+        <p:spPr>
+          <a:xfrm>
+            <a:off x="502920" y="164592"/>
+            <a:ext cx="1143000" cy="201168"/>
+          </a:xfrm>
+          <a:prstGeom prst="rect">
+            <a:avLst/>
+          </a:prstGeom>
+          <a:noFill/>
+        </p:spPr>
+        <p:txBody>
+          <a:bodyPr wrap="square" anchor="t">
+            <a:spAutoFit/>
+          </a:bodyPr>
+          <a:lstStyle/>
+          <a:p>
+            <a:r>
+              <a:rPr sz="1100" b="1">
+                <a:solidFill>
+                  <a:srgbClr val="FFFFFF"/>
+                </a:solidFill>
+                <a:latin typeface="Aptos"/>
+              </a:rPr>
+              <a:t>WEEK 1</a:t>
+            </a:r>
+          </a:p>
+        </p:txBody>
+      </p:sp>
+      <p:sp>
+        <p:nvSpPr>
+          <p:cNvPr id="4" name="TextBox 3"/>
+          <p:cNvSpPr txBox="1"/>
+          <p:nvPr/>
+        </p:nvSpPr>
+        <p:spPr>
+          <a:xfrm>
+            <a:off x="1572768" y="109728"/>
+            <a:ext cx="6492240" cy="320040"/>
+          </a:xfrm>
+          <a:prstGeom prst="rect">
+            <a:avLst/>
+          </a:prstGeom>
+          <a:noFill/>
+        </p:spPr>
+        <p:txBody>
+          <a:bodyPr wrap="square" anchor="t">
+            <a:spAutoFit/>
+          </a:bodyPr>
+          <a:lstStyle/>
+          <a:p>
+            <a:r>
+              <a:rPr sz="2000" b="1">
+                <a:solidFill>
+                  <a:srgbClr val="FFFFFF"/>
+                </a:solidFill>
+                <a:latin typeface="Aptos"/>
+              </a:rPr>
+              <a:t>Meet Your AI Teammate</a:t>
+            </a:r>
+          </a:p>
+        </p:txBody>
+      </p:sp>
+      <p:sp>
+        <p:nvSpPr>
+          <p:cNvPr id="5" name="TextBox 4"/>
+          <p:cNvSpPr txBox="1"/>
+          <p:nvPr/>
+        </p:nvSpPr>
+        <p:spPr>
+          <a:xfrm>
+            <a:off x="7909560" y="173736"/>
+            <a:ext cx="3749039" cy="182880"/>
+          </a:xfrm>
+          <a:prstGeom prst="rect">
+            <a:avLst/>
+          </a:prstGeom>
+          <a:noFill/>
+        </p:spPr>
+        <p:txBody>
+          <a:bodyPr wrap="square" anchor="t">
+            <a:spAutoFit/>
+          </a:bodyPr>
+          <a:lstStyle/>
+          <a:p>
+            <a:pPr algn="r"/>
+            <a:r>
+              <a:rPr sz="1050" b="0">
+                <a:solidFill>
+                  <a:srgbClr val="FFFFFF"/>
+                </a:solidFill>
+                <a:latin typeface="Aptos"/>
+              </a:rPr>
+              <a:t>ChatGPT Basics</a:t>
+            </a:r>
+          </a:p>
+        </p:txBody>
+      </p:sp>
+      <p:sp>
+        <p:nvSpPr>
+          <p:cNvPr id="6" name="TextBox 5"/>
+          <p:cNvSpPr txBox="1"/>
+          <p:nvPr/>
+        </p:nvSpPr>
+        <p:spPr>
+          <a:xfrm>
+            <a:off x="658368" y="932688"/>
+            <a:ext cx="10698480" cy="475488"/>
+          </a:xfrm>
+          <a:prstGeom prst="rect">
+            <a:avLst/>
+          </a:prstGeom>
+          <a:noFill/>
+        </p:spPr>
+        <p:txBody>
+          <a:bodyPr wrap="square" anchor="t">
+            <a:spAutoFit/>
+          </a:bodyPr>
+          <a:lstStyle/>
+          <a:p>
+            <a:r>
+              <a:rPr sz="3100" b="1">
+                <a:solidFill>
+                  <a:srgbClr val="172033"/>
+                </a:solidFill>
+                <a:latin typeface="Aptos"/>
+              </a:rPr>
+              <a:t>Big idea</a:t>
+            </a:r>
+          </a:p>
+        </p:txBody>
+      </p:sp>
+      <p:sp>
+        <p:nvSpPr>
+          <p:cNvPr id="7" name="TextBox 6"/>
+          <p:cNvSpPr txBox="1"/>
+          <p:nvPr/>
+        </p:nvSpPr>
+        <p:spPr>
+          <a:xfrm>
+            <a:off x="694944" y="1481328"/>
+            <a:ext cx="10424160" cy="256032"/>
+          </a:xfrm>
+          <a:prstGeom prst="rect">
+            <a:avLst/>
+          </a:prstGeom>
+          <a:noFill/>
+        </p:spPr>
+        <p:txBody>
+          <a:bodyPr wrap="square" anchor="t">
+            <a:spAutoFit/>
+          </a:bodyPr>
+          <a:lstStyle/>
+          <a:p>
+            <a:r>
+              <a:rPr sz="1500" b="0">
+                <a:solidFill>
+                  <a:srgbClr val="56657B"/>
+                </a:solidFill>
+                <a:latin typeface="Aptos"/>
+              </a:rPr>
+              <a:t>One concept students should remember after class.</a:t>
+            </a:r>
+          </a:p>
+        </p:txBody>
+      </p:sp>
+      <p:sp>
+        <p:nvSpPr>
+          <p:cNvPr id="8" name="TextBox 7"/>
+          <p:cNvSpPr txBox="1"/>
+          <p:nvPr/>
+        </p:nvSpPr>
+        <p:spPr>
+          <a:xfrm>
+            <a:off x="411480" y="6519672"/>
+            <a:ext cx="5303520" cy="164592"/>
+          </a:xfrm>
+          <a:prstGeom prst="rect">
+            <a:avLst/>
+          </a:prstGeom>
+          <a:noFill/>
+        </p:spPr>
+        <p:txBody>
+          <a:bodyPr wrap="square" anchor="t">
+            <a:spAutoFit/>
+          </a:bodyPr>
+          <a:lstStyle/>
+          <a:p>
+            <a:r>
+              <a:rPr sz="850" b="0">
+                <a:solidFill>
+                  <a:srgbClr val="56657B"/>
+                </a:solidFill>
+                <a:latin typeface="Aptos"/>
+              </a:rPr>
+              <a:t>AI Builders Academy | Week 1</a:t>
             </a:r>
           </a:p>
         </p:txBody>
@@ -3376,8 +5081,8 @@
         </p:nvSpPr>
         <p:spPr>
           <a:xfrm>
-            <a:off x="576072" y="1289304"/>
-            <a:ext cx="2432304" cy="594359"/>
+            <a:off x="10972800" y="6519672"/>
+            <a:ext cx="822960" cy="164592"/>
           </a:xfrm>
           <a:prstGeom prst="rect">
             <a:avLst/>
@@ -3390,28 +5095,64 @@
           </a:bodyPr>
           <a:lstStyle/>
           <a:p>
-            <a:r>
-              <a:rPr sz="1220" b="0">
+            <a:pPr algn="r"/>
+            <a:r>
+              <a:rPr sz="850" b="0">
+                <a:solidFill>
+                  <a:srgbClr val="56657B"/>
+                </a:solidFill>
+                <a:latin typeface="Aptos"/>
+              </a:rPr>
+              <a:t>4/9</a:t>
+            </a:r>
+          </a:p>
+        </p:txBody>
+      </p:sp>
+      <p:sp>
+        <p:nvSpPr>
+          <p:cNvPr id="10" name="TextBox 9"/>
+          <p:cNvSpPr txBox="1"/>
+          <p:nvPr/>
+        </p:nvSpPr>
+        <p:spPr>
+          <a:xfrm>
+            <a:off x="914400" y="1828800"/>
+            <a:ext cx="10332720" cy="685800"/>
+          </a:xfrm>
+          <a:prstGeom prst="rect">
+            <a:avLst/>
+          </a:prstGeom>
+          <a:noFill/>
+        </p:spPr>
+        <p:txBody>
+          <a:bodyPr wrap="square" anchor="t">
+            <a:spAutoFit/>
+          </a:bodyPr>
+          <a:lstStyle/>
+          <a:p>
+            <a:pPr algn="ctr"/>
+            <a:r>
+              <a:rPr sz="3400" b="1">
                 <a:solidFill>
                   <a:srgbClr val="172033"/>
                 </a:solidFill>
                 <a:latin typeface="Aptos"/>
               </a:rPr>
-              <a:t>Students learn that AI can be a tutor, coach, brainstorming partner, and project helper.</a:t>
-            </a:r>
-          </a:p>
-        </p:txBody>
-      </p:sp>
-      <p:sp>
-        <p:nvSpPr>
-          <p:cNvPr id="10" name="Rounded Rectangle 9"/>
+              <a:t>The student is the director. AI is the teammate.</a:t>
+            </a:r>
+          </a:p>
+        </p:txBody>
+      </p:sp>
+      <p:sp>
+        <p:nvSpPr>
+          <p:cNvPr id="11" name="Rounded Rectangle 10"/>
           <p:cNvSpPr/>
           <p:nvPr/>
         </p:nvSpPr>
         <p:spPr>
           <a:xfrm>
-            <a:off x="3337560" y="877824"/>
-            <a:ext cx="2331720" cy="1051560"/>
+            <a:off x="1005840" y="3063240"/>
+            <a:ext cx="10149840" cy="1645920"/>
           </a:xfrm>
           <a:prstGeom prst="roundRect">
             <a:avLst/>
@@ -3449,14 +5190,1634 @@
       </p:sp>
       <p:sp>
         <p:nvSpPr>
+          <p:cNvPr id="12" name="Rectangle 11"/>
+          <p:cNvSpPr/>
+          <p:nvPr/>
+        </p:nvSpPr>
+        <p:spPr>
+          <a:xfrm>
+            <a:off x="1005840" y="3063240"/>
+            <a:ext cx="73152" cy="1645920"/>
+          </a:xfrm>
+          <a:prstGeom prst="rect">
+            <a:avLst/>
+          </a:prstGeom>
+          <a:solidFill>
+            <a:srgbClr val="2563EB"/>
+          </a:solidFill>
+          <a:ln>
+            <a:solidFill>
+              <a:srgbClr val="2563EB"/>
+            </a:solidFill>
+          </a:ln>
+        </p:spPr>
+        <p:style>
+          <a:lnRef idx="1">
+            <a:schemeClr val="accent1"/>
+          </a:lnRef>
+          <a:fillRef idx="3">
+            <a:schemeClr val="accent1"/>
+          </a:fillRef>
+          <a:effectRef idx="2">
+            <a:schemeClr val="accent1"/>
+          </a:effectRef>
+          <a:fontRef idx="minor">
+            <a:schemeClr val="lt1"/>
+          </a:fontRef>
+        </p:style>
+        <p:txBody>
+          <a:bodyPr rtlCol="0" anchor="ctr"/>
+          <a:lstStyle/>
+          <a:p>
+            <a:pPr algn="ctr"/>
+          </a:p>
+        </p:txBody>
+      </p:sp>
+      <p:sp>
+        <p:nvSpPr>
+          <p:cNvPr id="13" name="TextBox 12"/>
+          <p:cNvSpPr txBox="1"/>
+          <p:nvPr/>
+        </p:nvSpPr>
+        <p:spPr>
+          <a:xfrm>
+            <a:off x="1170432" y="3191256"/>
+            <a:ext cx="9829800" cy="219456"/>
+          </a:xfrm>
+          <a:prstGeom prst="rect">
+            <a:avLst/>
+          </a:prstGeom>
+          <a:noFill/>
+        </p:spPr>
+        <p:txBody>
+          <a:bodyPr wrap="square" anchor="t">
+            <a:spAutoFit/>
+          </a:bodyPr>
+          <a:lstStyle/>
+          <a:p>
+            <a:r>
+              <a:rPr sz="1300" b="1">
+                <a:solidFill>
+                  <a:srgbClr val="2563EB"/>
+                </a:solidFill>
+                <a:latin typeface="Aptos"/>
+              </a:rPr>
+              <a:t>Key concepts</a:t>
+            </a:r>
+          </a:p>
+        </p:txBody>
+      </p:sp>
+      <p:sp>
+        <p:nvSpPr>
+          <p:cNvPr id="14" name="TextBox 13"/>
+          <p:cNvSpPr txBox="1"/>
+          <p:nvPr/>
+        </p:nvSpPr>
+        <p:spPr>
+          <a:xfrm>
+            <a:off x="1207008" y="3502152"/>
+            <a:ext cx="9765792" cy="1143000"/>
+          </a:xfrm>
+          <a:prstGeom prst="rect">
+            <a:avLst/>
+          </a:prstGeom>
+          <a:noFill/>
+        </p:spPr>
+        <p:txBody>
+          <a:bodyPr wrap="square">
+            <a:spAutoFit/>
+          </a:bodyPr>
+          <a:lstStyle/>
+          <a:p>
+            <a:pPr>
+              <a:spcAft>
+                <a:spcPts val="900"/>
+              </a:spcAft>
+              <a:defRPr sz="1400">
+                <a:solidFill>
+                  <a:srgbClr val="172033"/>
+                </a:solidFill>
+                <a:latin typeface="Aptos"/>
+              </a:defRPr>
+            </a:pPr>
+            <a:r>
+              <a:t>AI can take a role</a:t>
+            </a:r>
+          </a:p>
+          <a:p>
+            <a:pPr>
+              <a:spcAft>
+                <a:spcPts val="900"/>
+              </a:spcAft>
+              <a:defRPr sz="1400">
+                <a:solidFill>
+                  <a:srgbClr val="172033"/>
+                </a:solidFill>
+                <a:latin typeface="Aptos"/>
+              </a:defRPr>
+            </a:pPr>
+            <a:r>
+              <a:t>Specific context improves answers</a:t>
+            </a:r>
+          </a:p>
+          <a:p>
+            <a:pPr>
+              <a:spcAft>
+                <a:spcPts val="900"/>
+              </a:spcAft>
+              <a:defRPr sz="1400">
+                <a:solidFill>
+                  <a:srgbClr val="172033"/>
+                </a:solidFill>
+                <a:latin typeface="Aptos"/>
+              </a:defRPr>
+            </a:pPr>
+            <a:r>
+              <a:t>A good format makes answers easier to use</a:t>
+            </a:r>
+          </a:p>
+        </p:txBody>
+      </p:sp>
+    </p:spTree>
+  </p:cSld>
+  <p:clrMapOvr>
+    <a:masterClrMapping/>
+  </p:clrMapOvr>
+</p:sld>
+</file>
+
+<file path=ppt/slides/slide5.xml><?xml version="1.0" encoding="utf-8"?>
+<p:sld xmlns:a="http://schemas.openxmlformats.org/drawingml/2006/main" xmlns:p="http://schemas.openxmlformats.org/presentationml/2006/main" xmlns:r="http://schemas.openxmlformats.org/officeDocument/2006/relationships">
+  <p:cSld>
+    <p:bg>
+      <p:bgPr>
+        <a:solidFill>
+          <a:srgbClr val="F4F7FB"/>
+        </a:solidFill>
+        <a:effectLst/>
+      </p:bgPr>
+    </p:bg>
+    <p:spTree>
+      <p:nvGrpSpPr>
+        <p:cNvPr id="1" name=""/>
+        <p:cNvGrpSpPr/>
+        <p:nvPr/>
+      </p:nvGrpSpPr>
+      <p:grpSpPr/>
+      <p:sp>
+        <p:nvSpPr>
+          <p:cNvPr id="2" name="Rectangle 1"/>
+          <p:cNvSpPr/>
+          <p:nvPr/>
+        </p:nvSpPr>
+        <p:spPr>
+          <a:xfrm>
+            <a:off x="0" y="0"/>
+            <a:ext cx="12191695" cy="658368"/>
+          </a:xfrm>
+          <a:prstGeom prst="rect">
+            <a:avLst/>
+          </a:prstGeom>
+          <a:solidFill>
+            <a:srgbClr val="2563EB"/>
+          </a:solidFill>
+          <a:ln>
+            <a:solidFill>
+              <a:srgbClr val="2563EB"/>
+            </a:solidFill>
+          </a:ln>
+        </p:spPr>
+        <p:style>
+          <a:lnRef idx="1">
+            <a:schemeClr val="accent1"/>
+          </a:lnRef>
+          <a:fillRef idx="3">
+            <a:schemeClr val="accent1"/>
+          </a:fillRef>
+          <a:effectRef idx="2">
+            <a:schemeClr val="accent1"/>
+          </a:effectRef>
+          <a:fontRef idx="minor">
+            <a:schemeClr val="lt1"/>
+          </a:fontRef>
+        </p:style>
+        <p:txBody>
+          <a:bodyPr rtlCol="0" anchor="ctr"/>
+          <a:lstStyle/>
+          <a:p>
+            <a:pPr algn="ctr"/>
+          </a:p>
+        </p:txBody>
+      </p:sp>
+      <p:sp>
+        <p:nvSpPr>
+          <p:cNvPr id="3" name="TextBox 2"/>
+          <p:cNvSpPr txBox="1"/>
+          <p:nvPr/>
+        </p:nvSpPr>
+        <p:spPr>
+          <a:xfrm>
+            <a:off x="502920" y="164592"/>
+            <a:ext cx="1143000" cy="201168"/>
+          </a:xfrm>
+          <a:prstGeom prst="rect">
+            <a:avLst/>
+          </a:prstGeom>
+          <a:noFill/>
+        </p:spPr>
+        <p:txBody>
+          <a:bodyPr wrap="square" anchor="t">
+            <a:spAutoFit/>
+          </a:bodyPr>
+          <a:lstStyle/>
+          <a:p>
+            <a:r>
+              <a:rPr sz="1100" b="1">
+                <a:solidFill>
+                  <a:srgbClr val="FFFFFF"/>
+                </a:solidFill>
+                <a:latin typeface="Aptos"/>
+              </a:rPr>
+              <a:t>WEEK 1</a:t>
+            </a:r>
+          </a:p>
+        </p:txBody>
+      </p:sp>
+      <p:sp>
+        <p:nvSpPr>
+          <p:cNvPr id="4" name="TextBox 3"/>
+          <p:cNvSpPr txBox="1"/>
+          <p:nvPr/>
+        </p:nvSpPr>
+        <p:spPr>
+          <a:xfrm>
+            <a:off x="1572768" y="109728"/>
+            <a:ext cx="6492240" cy="320040"/>
+          </a:xfrm>
+          <a:prstGeom prst="rect">
+            <a:avLst/>
+          </a:prstGeom>
+          <a:noFill/>
+        </p:spPr>
+        <p:txBody>
+          <a:bodyPr wrap="square" anchor="t">
+            <a:spAutoFit/>
+          </a:bodyPr>
+          <a:lstStyle/>
+          <a:p>
+            <a:r>
+              <a:rPr sz="2000" b="1">
+                <a:solidFill>
+                  <a:srgbClr val="FFFFFF"/>
+                </a:solidFill>
+                <a:latin typeface="Aptos"/>
+              </a:rPr>
+              <a:t>Meet Your AI Teammate</a:t>
+            </a:r>
+          </a:p>
+        </p:txBody>
+      </p:sp>
+      <p:sp>
+        <p:nvSpPr>
+          <p:cNvPr id="5" name="TextBox 4"/>
+          <p:cNvSpPr txBox="1"/>
+          <p:nvPr/>
+        </p:nvSpPr>
+        <p:spPr>
+          <a:xfrm>
+            <a:off x="7909560" y="173736"/>
+            <a:ext cx="3749039" cy="182880"/>
+          </a:xfrm>
+          <a:prstGeom prst="rect">
+            <a:avLst/>
+          </a:prstGeom>
+          <a:noFill/>
+        </p:spPr>
+        <p:txBody>
+          <a:bodyPr wrap="square" anchor="t">
+            <a:spAutoFit/>
+          </a:bodyPr>
+          <a:lstStyle/>
+          <a:p>
+            <a:pPr algn="r"/>
+            <a:r>
+              <a:rPr sz="1050" b="0">
+                <a:solidFill>
+                  <a:srgbClr val="FFFFFF"/>
+                </a:solidFill>
+                <a:latin typeface="Aptos"/>
+              </a:rPr>
+              <a:t>ChatGPT Basics</a:t>
+            </a:r>
+          </a:p>
+        </p:txBody>
+      </p:sp>
+      <p:sp>
+        <p:nvSpPr>
+          <p:cNvPr id="6" name="TextBox 5"/>
+          <p:cNvSpPr txBox="1"/>
+          <p:nvPr/>
+        </p:nvSpPr>
+        <p:spPr>
+          <a:xfrm>
+            <a:off x="658368" y="932688"/>
+            <a:ext cx="10698480" cy="475488"/>
+          </a:xfrm>
+          <a:prstGeom prst="rect">
+            <a:avLst/>
+          </a:prstGeom>
+          <a:noFill/>
+        </p:spPr>
+        <p:txBody>
+          <a:bodyPr wrap="square" anchor="t">
+            <a:spAutoFit/>
+          </a:bodyPr>
+          <a:lstStyle/>
+          <a:p>
+            <a:r>
+              <a:rPr sz="3100" b="1">
+                <a:solidFill>
+                  <a:srgbClr val="172033"/>
+                </a:solidFill>
+                <a:latin typeface="Aptos"/>
+              </a:rPr>
+              <a:t>Bad prompt vs. good prompt</a:t>
+            </a:r>
+          </a:p>
+        </p:txBody>
+      </p:sp>
+      <p:sp>
+        <p:nvSpPr>
+          <p:cNvPr id="7" name="TextBox 6"/>
+          <p:cNvSpPr txBox="1"/>
+          <p:nvPr/>
+        </p:nvSpPr>
+        <p:spPr>
+          <a:xfrm>
+            <a:off x="694944" y="1481328"/>
+            <a:ext cx="10424160" cy="256032"/>
+          </a:xfrm>
+          <a:prstGeom prst="rect">
+            <a:avLst/>
+          </a:prstGeom>
+          <a:noFill/>
+        </p:spPr>
+        <p:txBody>
+          <a:bodyPr wrap="square" anchor="t">
+            <a:spAutoFit/>
+          </a:bodyPr>
+          <a:lstStyle/>
+          <a:p>
+            <a:r>
+              <a:rPr sz="1500" b="0">
+                <a:solidFill>
+                  <a:srgbClr val="56657B"/>
+                </a:solidFill>
+                <a:latin typeface="Aptos"/>
+              </a:rPr>
+              <a:t>Live demo: students see the result before the explanation.</a:t>
+            </a:r>
+          </a:p>
+        </p:txBody>
+      </p:sp>
+      <p:sp>
+        <p:nvSpPr>
+          <p:cNvPr id="8" name="TextBox 7"/>
+          <p:cNvSpPr txBox="1"/>
+          <p:nvPr/>
+        </p:nvSpPr>
+        <p:spPr>
+          <a:xfrm>
+            <a:off x="411480" y="6519672"/>
+            <a:ext cx="5303520" cy="164592"/>
+          </a:xfrm>
+          <a:prstGeom prst="rect">
+            <a:avLst/>
+          </a:prstGeom>
+          <a:noFill/>
+        </p:spPr>
+        <p:txBody>
+          <a:bodyPr wrap="square" anchor="t">
+            <a:spAutoFit/>
+          </a:bodyPr>
+          <a:lstStyle/>
+          <a:p>
+            <a:r>
+              <a:rPr sz="850" b="0">
+                <a:solidFill>
+                  <a:srgbClr val="56657B"/>
+                </a:solidFill>
+                <a:latin typeface="Aptos"/>
+              </a:rPr>
+              <a:t>AI Builders Academy | Week 1</a:t>
+            </a:r>
+          </a:p>
+        </p:txBody>
+      </p:sp>
+      <p:sp>
+        <p:nvSpPr>
+          <p:cNvPr id="9" name="TextBox 8"/>
+          <p:cNvSpPr txBox="1"/>
+          <p:nvPr/>
+        </p:nvSpPr>
+        <p:spPr>
+          <a:xfrm>
+            <a:off x="10972800" y="6519672"/>
+            <a:ext cx="822960" cy="164592"/>
+          </a:xfrm>
+          <a:prstGeom prst="rect">
+            <a:avLst/>
+          </a:prstGeom>
+          <a:noFill/>
+        </p:spPr>
+        <p:txBody>
+          <a:bodyPr wrap="square" anchor="t">
+            <a:spAutoFit/>
+          </a:bodyPr>
+          <a:lstStyle/>
+          <a:p>
+            <a:pPr algn="r"/>
+            <a:r>
+              <a:rPr sz="850" b="0">
+                <a:solidFill>
+                  <a:srgbClr val="56657B"/>
+                </a:solidFill>
+                <a:latin typeface="Aptos"/>
+              </a:rPr>
+              <a:t>5/9</a:t>
+            </a:r>
+          </a:p>
+        </p:txBody>
+      </p:sp>
+      <p:sp>
+        <p:nvSpPr>
+          <p:cNvPr id="10" name="Rounded Rectangle 9"/>
+          <p:cNvSpPr/>
+          <p:nvPr/>
+        </p:nvSpPr>
+        <p:spPr>
+          <a:xfrm>
+            <a:off x="868680" y="1828800"/>
+            <a:ext cx="4800600" cy="3108960"/>
+          </a:xfrm>
+          <a:prstGeom prst="roundRect">
+            <a:avLst/>
+          </a:prstGeom>
+          <a:solidFill>
+            <a:srgbClr val="FFFFFF"/>
+          </a:solidFill>
+          <a:ln>
+            <a:solidFill>
+              <a:srgbClr val="D9E2EE"/>
+            </a:solidFill>
+          </a:ln>
+        </p:spPr>
+        <p:style>
+          <a:lnRef idx="1">
+            <a:schemeClr val="accent1"/>
+          </a:lnRef>
+          <a:fillRef idx="3">
+            <a:schemeClr val="accent1"/>
+          </a:fillRef>
+          <a:effectRef idx="2">
+            <a:schemeClr val="accent1"/>
+          </a:effectRef>
+          <a:fontRef idx="minor">
+            <a:schemeClr val="lt1"/>
+          </a:fontRef>
+        </p:style>
+        <p:txBody>
+          <a:bodyPr rtlCol="0" anchor="ctr"/>
+          <a:lstStyle/>
+          <a:p>
+            <a:pPr algn="ctr"/>
+          </a:p>
+        </p:txBody>
+      </p:sp>
+      <p:sp>
+        <p:nvSpPr>
           <p:cNvPr id="11" name="Rectangle 10"/>
           <p:cNvSpPr/>
           <p:nvPr/>
         </p:nvSpPr>
         <p:spPr>
           <a:xfrm>
-            <a:off x="3337560" y="877824"/>
-            <a:ext cx="73152" cy="1051560"/>
+            <a:off x="868680" y="1828800"/>
+            <a:ext cx="73152" cy="3108960"/>
+          </a:xfrm>
+          <a:prstGeom prst="rect">
+            <a:avLst/>
+          </a:prstGeom>
+          <a:solidFill>
+            <a:srgbClr val="2563EB"/>
+          </a:solidFill>
+          <a:ln>
+            <a:solidFill>
+              <a:srgbClr val="2563EB"/>
+            </a:solidFill>
+          </a:ln>
+        </p:spPr>
+        <p:style>
+          <a:lnRef idx="1">
+            <a:schemeClr val="accent1"/>
+          </a:lnRef>
+          <a:fillRef idx="3">
+            <a:schemeClr val="accent1"/>
+          </a:fillRef>
+          <a:effectRef idx="2">
+            <a:schemeClr val="accent1"/>
+          </a:effectRef>
+          <a:fontRef idx="minor">
+            <a:schemeClr val="lt1"/>
+          </a:fontRef>
+        </p:style>
+        <p:txBody>
+          <a:bodyPr rtlCol="0" anchor="ctr"/>
+          <a:lstStyle/>
+          <a:p>
+            <a:pPr algn="ctr"/>
+          </a:p>
+        </p:txBody>
+      </p:sp>
+      <p:sp>
+        <p:nvSpPr>
+          <p:cNvPr id="12" name="TextBox 11"/>
+          <p:cNvSpPr txBox="1"/>
+          <p:nvPr/>
+        </p:nvSpPr>
+        <p:spPr>
+          <a:xfrm>
+            <a:off x="1033271" y="1956816"/>
+            <a:ext cx="4480560" cy="219456"/>
+          </a:xfrm>
+          <a:prstGeom prst="rect">
+            <a:avLst/>
+          </a:prstGeom>
+          <a:noFill/>
+        </p:spPr>
+        <p:txBody>
+          <a:bodyPr wrap="square" anchor="t">
+            <a:spAutoFit/>
+          </a:bodyPr>
+          <a:lstStyle/>
+          <a:p>
+            <a:r>
+              <a:rPr sz="1300" b="1">
+                <a:solidFill>
+                  <a:srgbClr val="2563EB"/>
+                </a:solidFill>
+                <a:latin typeface="Aptos"/>
+              </a:rPr>
+              <a:t>Demo steps</a:t>
+            </a:r>
+          </a:p>
+        </p:txBody>
+      </p:sp>
+      <p:sp>
+        <p:nvSpPr>
+          <p:cNvPr id="13" name="TextBox 12"/>
+          <p:cNvSpPr txBox="1"/>
+          <p:nvPr/>
+        </p:nvSpPr>
+        <p:spPr>
+          <a:xfrm>
+            <a:off x="1069848" y="2267712"/>
+            <a:ext cx="4416552" cy="2606039"/>
+          </a:xfrm>
+          <a:prstGeom prst="rect">
+            <a:avLst/>
+          </a:prstGeom>
+          <a:noFill/>
+        </p:spPr>
+        <p:txBody>
+          <a:bodyPr wrap="square">
+            <a:spAutoFit/>
+          </a:bodyPr>
+          <a:lstStyle/>
+          <a:p>
+            <a:pPr>
+              <a:spcAft>
+                <a:spcPts val="900"/>
+              </a:spcAft>
+              <a:defRPr sz="1400">
+                <a:solidFill>
+                  <a:srgbClr val="172033"/>
+                </a:solidFill>
+                <a:latin typeface="Aptos"/>
+              </a:defRPr>
+            </a:pPr>
+            <a:r>
+              <a:t>Bad: Help me study.</a:t>
+            </a:r>
+          </a:p>
+          <a:p>
+            <a:pPr>
+              <a:spcAft>
+                <a:spcPts val="900"/>
+              </a:spcAft>
+              <a:defRPr sz="1400">
+                <a:solidFill>
+                  <a:srgbClr val="172033"/>
+                </a:solidFill>
+                <a:latin typeface="Aptos"/>
+              </a:defRPr>
+            </a:pPr>
+            <a:r>
+              <a:t>Better: Act as a friendly biology tutor. Quiz me on cells one question at a time. If I miss one, explain it simply.</a:t>
+            </a:r>
+          </a:p>
+        </p:txBody>
+      </p:sp>
+      <p:sp>
+        <p:nvSpPr>
+          <p:cNvPr id="14" name="Rounded Rectangle 13"/>
+          <p:cNvSpPr/>
+          <p:nvPr/>
+        </p:nvSpPr>
+        <p:spPr>
+          <a:xfrm>
+            <a:off x="5989320" y="1828800"/>
+            <a:ext cx="5257800" cy="3108960"/>
+          </a:xfrm>
+          <a:prstGeom prst="roundRect">
+            <a:avLst/>
+          </a:prstGeom>
+          <a:solidFill>
+            <a:srgbClr val="FFF7ED"/>
+          </a:solidFill>
+          <a:ln>
+            <a:solidFill>
+              <a:srgbClr val="D9E2EE"/>
+            </a:solidFill>
+          </a:ln>
+        </p:spPr>
+        <p:style>
+          <a:lnRef idx="1">
+            <a:schemeClr val="accent1"/>
+          </a:lnRef>
+          <a:fillRef idx="3">
+            <a:schemeClr val="accent1"/>
+          </a:fillRef>
+          <a:effectRef idx="2">
+            <a:schemeClr val="accent1"/>
+          </a:effectRef>
+          <a:fontRef idx="minor">
+            <a:schemeClr val="lt1"/>
+          </a:fontRef>
+        </p:style>
+        <p:txBody>
+          <a:bodyPr rtlCol="0" anchor="ctr"/>
+          <a:lstStyle/>
+          <a:p>
+            <a:pPr algn="ctr"/>
+          </a:p>
+        </p:txBody>
+      </p:sp>
+      <p:sp>
+        <p:nvSpPr>
+          <p:cNvPr id="15" name="Rectangle 14"/>
+          <p:cNvSpPr/>
+          <p:nvPr/>
+        </p:nvSpPr>
+        <p:spPr>
+          <a:xfrm>
+            <a:off x="5989320" y="1828800"/>
+            <a:ext cx="73152" cy="3108960"/>
+          </a:xfrm>
+          <a:prstGeom prst="rect">
+            <a:avLst/>
+          </a:prstGeom>
+          <a:solidFill>
+            <a:srgbClr val="F97316"/>
+          </a:solidFill>
+          <a:ln>
+            <a:solidFill>
+              <a:srgbClr val="F97316"/>
+            </a:solidFill>
+          </a:ln>
+        </p:spPr>
+        <p:style>
+          <a:lnRef idx="1">
+            <a:schemeClr val="accent1"/>
+          </a:lnRef>
+          <a:fillRef idx="3">
+            <a:schemeClr val="accent1"/>
+          </a:fillRef>
+          <a:effectRef idx="2">
+            <a:schemeClr val="accent1"/>
+          </a:effectRef>
+          <a:fontRef idx="minor">
+            <a:schemeClr val="lt1"/>
+          </a:fontRef>
+        </p:style>
+        <p:txBody>
+          <a:bodyPr rtlCol="0" anchor="ctr"/>
+          <a:lstStyle/>
+          <a:p>
+            <a:pPr algn="ctr"/>
+          </a:p>
+        </p:txBody>
+      </p:sp>
+      <p:sp>
+        <p:nvSpPr>
+          <p:cNvPr id="16" name="TextBox 15"/>
+          <p:cNvSpPr txBox="1"/>
+          <p:nvPr/>
+        </p:nvSpPr>
+        <p:spPr>
+          <a:xfrm>
+            <a:off x="6153912" y="1956816"/>
+            <a:ext cx="4937760" cy="219456"/>
+          </a:xfrm>
+          <a:prstGeom prst="rect">
+            <a:avLst/>
+          </a:prstGeom>
+          <a:noFill/>
+        </p:spPr>
+        <p:txBody>
+          <a:bodyPr wrap="square" anchor="t">
+            <a:spAutoFit/>
+          </a:bodyPr>
+          <a:lstStyle/>
+          <a:p>
+            <a:r>
+              <a:rPr sz="1300" b="1">
+                <a:solidFill>
+                  <a:srgbClr val="F97316"/>
+                </a:solidFill>
+                <a:latin typeface="Aptos"/>
+              </a:rPr>
+              <a:t>Tutor move</a:t>
+            </a:r>
+          </a:p>
+        </p:txBody>
+      </p:sp>
+      <p:sp>
+        <p:nvSpPr>
+          <p:cNvPr id="17" name="TextBox 16"/>
+          <p:cNvSpPr txBox="1"/>
+          <p:nvPr/>
+        </p:nvSpPr>
+        <p:spPr>
+          <a:xfrm>
+            <a:off x="6190488" y="2267712"/>
+            <a:ext cx="4873752" cy="2606039"/>
+          </a:xfrm>
+          <a:prstGeom prst="rect">
+            <a:avLst/>
+          </a:prstGeom>
+          <a:noFill/>
+        </p:spPr>
+        <p:txBody>
+          <a:bodyPr wrap="square">
+            <a:spAutoFit/>
+          </a:bodyPr>
+          <a:lstStyle/>
+          <a:p>
+            <a:pPr>
+              <a:spcAft>
+                <a:spcPts val="900"/>
+              </a:spcAft>
+              <a:defRPr sz="1400">
+                <a:solidFill>
+                  <a:srgbClr val="172033"/>
+                </a:solidFill>
+                <a:latin typeface="Aptos"/>
+              </a:defRPr>
+            </a:pPr>
+            <a:r>
+              <a:t>Narrate what you are asking AI to do.</a:t>
+            </a:r>
+          </a:p>
+          <a:p>
+            <a:pPr>
+              <a:spcAft>
+                <a:spcPts val="900"/>
+              </a:spcAft>
+              <a:defRPr sz="1400">
+                <a:solidFill>
+                  <a:srgbClr val="172033"/>
+                </a:solidFill>
+                <a:latin typeface="Aptos"/>
+              </a:defRPr>
+            </a:pPr>
+            <a:r>
+              <a:t>Pause after the output.</a:t>
+            </a:r>
+          </a:p>
+          <a:p>
+            <a:pPr>
+              <a:spcAft>
+                <a:spcPts val="900"/>
+              </a:spcAft>
+              <a:defRPr sz="1400">
+                <a:solidFill>
+                  <a:srgbClr val="172033"/>
+                </a:solidFill>
+                <a:latin typeface="Aptos"/>
+              </a:defRPr>
+            </a:pPr>
+            <a:r>
+              <a:t>Ask: What should we improve next?</a:t>
+            </a:r>
+          </a:p>
+        </p:txBody>
+      </p:sp>
+    </p:spTree>
+  </p:cSld>
+  <p:clrMapOvr>
+    <a:masterClrMapping/>
+  </p:clrMapOvr>
+</p:sld>
+</file>
+
+<file path=ppt/slides/slide6.xml><?xml version="1.0" encoding="utf-8"?>
+<p:sld xmlns:a="http://schemas.openxmlformats.org/drawingml/2006/main" xmlns:p="http://schemas.openxmlformats.org/presentationml/2006/main" xmlns:r="http://schemas.openxmlformats.org/officeDocument/2006/relationships">
+  <p:cSld>
+    <p:bg>
+      <p:bgPr>
+        <a:solidFill>
+          <a:srgbClr val="F4F7FB"/>
+        </a:solidFill>
+        <a:effectLst/>
+      </p:bgPr>
+    </p:bg>
+    <p:spTree>
+      <p:nvGrpSpPr>
+        <p:cNvPr id="1" name=""/>
+        <p:cNvGrpSpPr/>
+        <p:nvPr/>
+      </p:nvGrpSpPr>
+      <p:grpSpPr/>
+      <p:sp>
+        <p:nvSpPr>
+          <p:cNvPr id="2" name="Rectangle 1"/>
+          <p:cNvSpPr/>
+          <p:nvPr/>
+        </p:nvSpPr>
+        <p:spPr>
+          <a:xfrm>
+            <a:off x="0" y="0"/>
+            <a:ext cx="12191695" cy="658368"/>
+          </a:xfrm>
+          <a:prstGeom prst="rect">
+            <a:avLst/>
+          </a:prstGeom>
+          <a:solidFill>
+            <a:srgbClr val="2563EB"/>
+          </a:solidFill>
+          <a:ln>
+            <a:solidFill>
+              <a:srgbClr val="2563EB"/>
+            </a:solidFill>
+          </a:ln>
+        </p:spPr>
+        <p:style>
+          <a:lnRef idx="1">
+            <a:schemeClr val="accent1"/>
+          </a:lnRef>
+          <a:fillRef idx="3">
+            <a:schemeClr val="accent1"/>
+          </a:fillRef>
+          <a:effectRef idx="2">
+            <a:schemeClr val="accent1"/>
+          </a:effectRef>
+          <a:fontRef idx="minor">
+            <a:schemeClr val="lt1"/>
+          </a:fontRef>
+        </p:style>
+        <p:txBody>
+          <a:bodyPr rtlCol="0" anchor="ctr"/>
+          <a:lstStyle/>
+          <a:p>
+            <a:pPr algn="ctr"/>
+          </a:p>
+        </p:txBody>
+      </p:sp>
+      <p:sp>
+        <p:nvSpPr>
+          <p:cNvPr id="3" name="TextBox 2"/>
+          <p:cNvSpPr txBox="1"/>
+          <p:nvPr/>
+        </p:nvSpPr>
+        <p:spPr>
+          <a:xfrm>
+            <a:off x="502920" y="164592"/>
+            <a:ext cx="1143000" cy="201168"/>
+          </a:xfrm>
+          <a:prstGeom prst="rect">
+            <a:avLst/>
+          </a:prstGeom>
+          <a:noFill/>
+        </p:spPr>
+        <p:txBody>
+          <a:bodyPr wrap="square" anchor="t">
+            <a:spAutoFit/>
+          </a:bodyPr>
+          <a:lstStyle/>
+          <a:p>
+            <a:r>
+              <a:rPr sz="1100" b="1">
+                <a:solidFill>
+                  <a:srgbClr val="FFFFFF"/>
+                </a:solidFill>
+                <a:latin typeface="Aptos"/>
+              </a:rPr>
+              <a:t>WEEK 1</a:t>
+            </a:r>
+          </a:p>
+        </p:txBody>
+      </p:sp>
+      <p:sp>
+        <p:nvSpPr>
+          <p:cNvPr id="4" name="TextBox 3"/>
+          <p:cNvSpPr txBox="1"/>
+          <p:nvPr/>
+        </p:nvSpPr>
+        <p:spPr>
+          <a:xfrm>
+            <a:off x="1572768" y="109728"/>
+            <a:ext cx="6492240" cy="320040"/>
+          </a:xfrm>
+          <a:prstGeom prst="rect">
+            <a:avLst/>
+          </a:prstGeom>
+          <a:noFill/>
+        </p:spPr>
+        <p:txBody>
+          <a:bodyPr wrap="square" anchor="t">
+            <a:spAutoFit/>
+          </a:bodyPr>
+          <a:lstStyle/>
+          <a:p>
+            <a:r>
+              <a:rPr sz="2000" b="1">
+                <a:solidFill>
+                  <a:srgbClr val="FFFFFF"/>
+                </a:solidFill>
+                <a:latin typeface="Aptos"/>
+              </a:rPr>
+              <a:t>Meet Your AI Teammate</a:t>
+            </a:r>
+          </a:p>
+        </p:txBody>
+      </p:sp>
+      <p:sp>
+        <p:nvSpPr>
+          <p:cNvPr id="5" name="TextBox 4"/>
+          <p:cNvSpPr txBox="1"/>
+          <p:nvPr/>
+        </p:nvSpPr>
+        <p:spPr>
+          <a:xfrm>
+            <a:off x="7909560" y="173736"/>
+            <a:ext cx="3749039" cy="182880"/>
+          </a:xfrm>
+          <a:prstGeom prst="rect">
+            <a:avLst/>
+          </a:prstGeom>
+          <a:noFill/>
+        </p:spPr>
+        <p:txBody>
+          <a:bodyPr wrap="square" anchor="t">
+            <a:spAutoFit/>
+          </a:bodyPr>
+          <a:lstStyle/>
+          <a:p>
+            <a:pPr algn="r"/>
+            <a:r>
+              <a:rPr sz="1050" b="0">
+                <a:solidFill>
+                  <a:srgbClr val="FFFFFF"/>
+                </a:solidFill>
+                <a:latin typeface="Aptos"/>
+              </a:rPr>
+              <a:t>ChatGPT Basics</a:t>
+            </a:r>
+          </a:p>
+        </p:txBody>
+      </p:sp>
+      <p:sp>
+        <p:nvSpPr>
+          <p:cNvPr id="6" name="TextBox 5"/>
+          <p:cNvSpPr txBox="1"/>
+          <p:nvPr/>
+        </p:nvSpPr>
+        <p:spPr>
+          <a:xfrm>
+            <a:off x="658368" y="932688"/>
+            <a:ext cx="10698480" cy="475488"/>
+          </a:xfrm>
+          <a:prstGeom prst="rect">
+            <a:avLst/>
+          </a:prstGeom>
+          <a:noFill/>
+        </p:spPr>
+        <p:txBody>
+          <a:bodyPr wrap="square" anchor="t">
+            <a:spAutoFit/>
+          </a:bodyPr>
+          <a:lstStyle/>
+          <a:p>
+            <a:r>
+              <a:rPr sz="3100" b="1">
+                <a:solidFill>
+                  <a:srgbClr val="172033"/>
+                </a:solidFill>
+                <a:latin typeface="Aptos"/>
+              </a:rPr>
+              <a:t>Live prompt</a:t>
+            </a:r>
+          </a:p>
+        </p:txBody>
+      </p:sp>
+      <p:sp>
+        <p:nvSpPr>
+          <p:cNvPr id="7" name="TextBox 6"/>
+          <p:cNvSpPr txBox="1"/>
+          <p:nvPr/>
+        </p:nvSpPr>
+        <p:spPr>
+          <a:xfrm>
+            <a:off x="694944" y="1481328"/>
+            <a:ext cx="10424160" cy="256032"/>
+          </a:xfrm>
+          <a:prstGeom prst="rect">
+            <a:avLst/>
+          </a:prstGeom>
+          <a:noFill/>
+        </p:spPr>
+        <p:txBody>
+          <a:bodyPr wrap="square" anchor="t">
+            <a:spAutoFit/>
+          </a:bodyPr>
+          <a:lstStyle/>
+          <a:p>
+            <a:r>
+              <a:rPr sz="1500" b="0">
+                <a:solidFill>
+                  <a:srgbClr val="56657B"/>
+                </a:solidFill>
+                <a:latin typeface="Aptos"/>
+              </a:rPr>
+              <a:t>Copy, modify, and use during the demo.</a:t>
+            </a:r>
+          </a:p>
+        </p:txBody>
+      </p:sp>
+      <p:sp>
+        <p:nvSpPr>
+          <p:cNvPr id="8" name="TextBox 7"/>
+          <p:cNvSpPr txBox="1"/>
+          <p:nvPr/>
+        </p:nvSpPr>
+        <p:spPr>
+          <a:xfrm>
+            <a:off x="411480" y="6519672"/>
+            <a:ext cx="5303520" cy="164592"/>
+          </a:xfrm>
+          <a:prstGeom prst="rect">
+            <a:avLst/>
+          </a:prstGeom>
+          <a:noFill/>
+        </p:spPr>
+        <p:txBody>
+          <a:bodyPr wrap="square" anchor="t">
+            <a:spAutoFit/>
+          </a:bodyPr>
+          <a:lstStyle/>
+          <a:p>
+            <a:r>
+              <a:rPr sz="850" b="0">
+                <a:solidFill>
+                  <a:srgbClr val="56657B"/>
+                </a:solidFill>
+                <a:latin typeface="Aptos"/>
+              </a:rPr>
+              <a:t>AI Builders Academy | Week 1</a:t>
+            </a:r>
+          </a:p>
+        </p:txBody>
+      </p:sp>
+      <p:sp>
+        <p:nvSpPr>
+          <p:cNvPr id="9" name="TextBox 8"/>
+          <p:cNvSpPr txBox="1"/>
+          <p:nvPr/>
+        </p:nvSpPr>
+        <p:spPr>
+          <a:xfrm>
+            <a:off x="10972800" y="6519672"/>
+            <a:ext cx="822960" cy="164592"/>
+          </a:xfrm>
+          <a:prstGeom prst="rect">
+            <a:avLst/>
+          </a:prstGeom>
+          <a:noFill/>
+        </p:spPr>
+        <p:txBody>
+          <a:bodyPr wrap="square" anchor="t">
+            <a:spAutoFit/>
+          </a:bodyPr>
+          <a:lstStyle/>
+          <a:p>
+            <a:pPr algn="r"/>
+            <a:r>
+              <a:rPr sz="850" b="0">
+                <a:solidFill>
+                  <a:srgbClr val="56657B"/>
+                </a:solidFill>
+                <a:latin typeface="Aptos"/>
+              </a:rPr>
+              <a:t>6/9</a:t>
+            </a:r>
+          </a:p>
+        </p:txBody>
+      </p:sp>
+      <p:sp>
+        <p:nvSpPr>
+          <p:cNvPr id="10" name="Rounded Rectangle 9"/>
+          <p:cNvSpPr/>
+          <p:nvPr/>
+        </p:nvSpPr>
+        <p:spPr>
+          <a:xfrm>
+            <a:off x="822960" y="1874519"/>
+            <a:ext cx="10561320" cy="2788920"/>
+          </a:xfrm>
+          <a:prstGeom prst="roundRect">
+            <a:avLst/>
+          </a:prstGeom>
+          <a:solidFill>
+            <a:srgbClr val="0F172A"/>
+          </a:solidFill>
+          <a:ln>
+            <a:solidFill>
+              <a:srgbClr val="0F172A"/>
+            </a:solidFill>
+          </a:ln>
+        </p:spPr>
+        <p:style>
+          <a:lnRef idx="1">
+            <a:schemeClr val="accent1"/>
+          </a:lnRef>
+          <a:fillRef idx="3">
+            <a:schemeClr val="accent1"/>
+          </a:fillRef>
+          <a:effectRef idx="2">
+            <a:schemeClr val="accent1"/>
+          </a:effectRef>
+          <a:fontRef idx="minor">
+            <a:schemeClr val="lt1"/>
+          </a:fontRef>
+        </p:style>
+        <p:txBody>
+          <a:bodyPr rtlCol="0" anchor="ctr"/>
+          <a:lstStyle/>
+          <a:p>
+            <a:pPr algn="ctr"/>
+          </a:p>
+        </p:txBody>
+      </p:sp>
+      <p:sp>
+        <p:nvSpPr>
+          <p:cNvPr id="11" name="TextBox 10"/>
+          <p:cNvSpPr txBox="1"/>
+          <p:nvPr/>
+        </p:nvSpPr>
+        <p:spPr>
+          <a:xfrm>
+            <a:off x="1078992" y="2121408"/>
+            <a:ext cx="10058400" cy="2240280"/>
+          </a:xfrm>
+          <a:prstGeom prst="rect">
+            <a:avLst/>
+          </a:prstGeom>
+          <a:noFill/>
+        </p:spPr>
+        <p:txBody>
+          <a:bodyPr wrap="square" anchor="t">
+            <a:spAutoFit/>
+          </a:bodyPr>
+          <a:lstStyle/>
+          <a:p>
+            <a:r>
+              <a:rPr sz="2100" b="0">
+                <a:solidFill>
+                  <a:srgbClr val="FFFFFF"/>
+                </a:solidFill>
+                <a:latin typeface="Aptos"/>
+              </a:rPr>
+              <a:t>Act as a friendly study coach for a high school student.</a:t>
+            </a:r>
+            <a:br/>
+            <a:r>
+              <a:t>Help me study [topic]. Ask one question at a time. If I get it wrong, explain simply and let me try again.</a:t>
+            </a:r>
+          </a:p>
+        </p:txBody>
+      </p:sp>
+      <p:sp>
+        <p:nvSpPr>
+          <p:cNvPr id="12" name="TextBox 11"/>
+          <p:cNvSpPr txBox="1"/>
+          <p:nvPr/>
+        </p:nvSpPr>
+        <p:spPr>
+          <a:xfrm>
+            <a:off x="960120" y="5074920"/>
+            <a:ext cx="9875520" cy="320040"/>
+          </a:xfrm>
+          <a:prstGeom prst="rect">
+            <a:avLst/>
+          </a:prstGeom>
+          <a:noFill/>
+        </p:spPr>
+        <p:txBody>
+          <a:bodyPr wrap="square" anchor="t">
+            <a:spAutoFit/>
+          </a:bodyPr>
+          <a:lstStyle/>
+          <a:p>
+            <a:pPr algn="ctr"/>
+            <a:r>
+              <a:rPr sz="1600" b="1">
+                <a:solidFill>
+                  <a:srgbClr val="2563EB"/>
+                </a:solidFill>
+                <a:latin typeface="Aptos"/>
+              </a:rPr>
+              <a:t>After the response, ask students: What worked? What is missing? What should we ask next?</a:t>
+            </a:r>
+          </a:p>
+        </p:txBody>
+      </p:sp>
+    </p:spTree>
+  </p:cSld>
+  <p:clrMapOvr>
+    <a:masterClrMapping/>
+  </p:clrMapOvr>
+</p:sld>
+</file>
+
+<file path=ppt/slides/slide7.xml><?xml version="1.0" encoding="utf-8"?>
+<p:sld xmlns:a="http://schemas.openxmlformats.org/drawingml/2006/main" xmlns:p="http://schemas.openxmlformats.org/presentationml/2006/main" xmlns:r="http://schemas.openxmlformats.org/officeDocument/2006/relationships">
+  <p:cSld>
+    <p:bg>
+      <p:bgPr>
+        <a:solidFill>
+          <a:srgbClr val="F4F7FB"/>
+        </a:solidFill>
+        <a:effectLst/>
+      </p:bgPr>
+    </p:bg>
+    <p:spTree>
+      <p:nvGrpSpPr>
+        <p:cNvPr id="1" name=""/>
+        <p:cNvGrpSpPr/>
+        <p:nvPr/>
+      </p:nvGrpSpPr>
+      <p:grpSpPr/>
+      <p:sp>
+        <p:nvSpPr>
+          <p:cNvPr id="2" name="Rectangle 1"/>
+          <p:cNvSpPr/>
+          <p:nvPr/>
+        </p:nvSpPr>
+        <p:spPr>
+          <a:xfrm>
+            <a:off x="0" y="0"/>
+            <a:ext cx="12191695" cy="658368"/>
+          </a:xfrm>
+          <a:prstGeom prst="rect">
+            <a:avLst/>
+          </a:prstGeom>
+          <a:solidFill>
+            <a:srgbClr val="2563EB"/>
+          </a:solidFill>
+          <a:ln>
+            <a:solidFill>
+              <a:srgbClr val="2563EB"/>
+            </a:solidFill>
+          </a:ln>
+        </p:spPr>
+        <p:style>
+          <a:lnRef idx="1">
+            <a:schemeClr val="accent1"/>
+          </a:lnRef>
+          <a:fillRef idx="3">
+            <a:schemeClr val="accent1"/>
+          </a:fillRef>
+          <a:effectRef idx="2">
+            <a:schemeClr val="accent1"/>
+          </a:effectRef>
+          <a:fontRef idx="minor">
+            <a:schemeClr val="lt1"/>
+          </a:fontRef>
+        </p:style>
+        <p:txBody>
+          <a:bodyPr rtlCol="0" anchor="ctr"/>
+          <a:lstStyle/>
+          <a:p>
+            <a:pPr algn="ctr"/>
+          </a:p>
+        </p:txBody>
+      </p:sp>
+      <p:sp>
+        <p:nvSpPr>
+          <p:cNvPr id="3" name="TextBox 2"/>
+          <p:cNvSpPr txBox="1"/>
+          <p:nvPr/>
+        </p:nvSpPr>
+        <p:spPr>
+          <a:xfrm>
+            <a:off x="502920" y="164592"/>
+            <a:ext cx="1143000" cy="201168"/>
+          </a:xfrm>
+          <a:prstGeom prst="rect">
+            <a:avLst/>
+          </a:prstGeom>
+          <a:noFill/>
+        </p:spPr>
+        <p:txBody>
+          <a:bodyPr wrap="square" anchor="t">
+            <a:spAutoFit/>
+          </a:bodyPr>
+          <a:lstStyle/>
+          <a:p>
+            <a:r>
+              <a:rPr sz="1100" b="1">
+                <a:solidFill>
+                  <a:srgbClr val="FFFFFF"/>
+                </a:solidFill>
+                <a:latin typeface="Aptos"/>
+              </a:rPr>
+              <a:t>WEEK 1</a:t>
+            </a:r>
+          </a:p>
+        </p:txBody>
+      </p:sp>
+      <p:sp>
+        <p:nvSpPr>
+          <p:cNvPr id="4" name="TextBox 3"/>
+          <p:cNvSpPr txBox="1"/>
+          <p:nvPr/>
+        </p:nvSpPr>
+        <p:spPr>
+          <a:xfrm>
+            <a:off x="1572768" y="109728"/>
+            <a:ext cx="6492240" cy="320040"/>
+          </a:xfrm>
+          <a:prstGeom prst="rect">
+            <a:avLst/>
+          </a:prstGeom>
+          <a:noFill/>
+        </p:spPr>
+        <p:txBody>
+          <a:bodyPr wrap="square" anchor="t">
+            <a:spAutoFit/>
+          </a:bodyPr>
+          <a:lstStyle/>
+          <a:p>
+            <a:r>
+              <a:rPr sz="2000" b="1">
+                <a:solidFill>
+                  <a:srgbClr val="FFFFFF"/>
+                </a:solidFill>
+                <a:latin typeface="Aptos"/>
+              </a:rPr>
+              <a:t>Meet Your AI Teammate</a:t>
+            </a:r>
+          </a:p>
+        </p:txBody>
+      </p:sp>
+      <p:sp>
+        <p:nvSpPr>
+          <p:cNvPr id="5" name="TextBox 4"/>
+          <p:cNvSpPr txBox="1"/>
+          <p:nvPr/>
+        </p:nvSpPr>
+        <p:spPr>
+          <a:xfrm>
+            <a:off x="7909560" y="173736"/>
+            <a:ext cx="3749039" cy="182880"/>
+          </a:xfrm>
+          <a:prstGeom prst="rect">
+            <a:avLst/>
+          </a:prstGeom>
+          <a:noFill/>
+        </p:spPr>
+        <p:txBody>
+          <a:bodyPr wrap="square" anchor="t">
+            <a:spAutoFit/>
+          </a:bodyPr>
+          <a:lstStyle/>
+          <a:p>
+            <a:pPr algn="r"/>
+            <a:r>
+              <a:rPr sz="1050" b="0">
+                <a:solidFill>
+                  <a:srgbClr val="FFFFFF"/>
+                </a:solidFill>
+                <a:latin typeface="Aptos"/>
+              </a:rPr>
+              <a:t>ChatGPT Basics</a:t>
+            </a:r>
+          </a:p>
+        </p:txBody>
+      </p:sp>
+      <p:sp>
+        <p:nvSpPr>
+          <p:cNvPr id="6" name="TextBox 5"/>
+          <p:cNvSpPr txBox="1"/>
+          <p:nvPr/>
+        </p:nvSpPr>
+        <p:spPr>
+          <a:xfrm>
+            <a:off x="658368" y="932688"/>
+            <a:ext cx="10698480" cy="475488"/>
+          </a:xfrm>
+          <a:prstGeom prst="rect">
+            <a:avLst/>
+          </a:prstGeom>
+          <a:noFill/>
+        </p:spPr>
+        <p:txBody>
+          <a:bodyPr wrap="square" anchor="t">
+            <a:spAutoFit/>
+          </a:bodyPr>
+          <a:lstStyle/>
+          <a:p>
+            <a:r>
+              <a:rPr sz="3100" b="1">
+                <a:solidFill>
+                  <a:srgbClr val="172033"/>
+                </a:solidFill>
+                <a:latin typeface="Aptos"/>
+              </a:rPr>
+              <a:t>Hands-on build</a:t>
+            </a:r>
+          </a:p>
+        </p:txBody>
+      </p:sp>
+      <p:sp>
+        <p:nvSpPr>
+          <p:cNvPr id="7" name="TextBox 6"/>
+          <p:cNvSpPr txBox="1"/>
+          <p:nvPr/>
+        </p:nvSpPr>
+        <p:spPr>
+          <a:xfrm>
+            <a:off x="694944" y="1481328"/>
+            <a:ext cx="10424160" cy="256032"/>
+          </a:xfrm>
+          <a:prstGeom prst="rect">
+            <a:avLst/>
+          </a:prstGeom>
+          <a:noFill/>
+        </p:spPr>
+        <p:txBody>
+          <a:bodyPr wrap="square" anchor="t">
+            <a:spAutoFit/>
+          </a:bodyPr>
+          <a:lstStyle/>
+          <a:p>
+            <a:r>
+              <a:rPr sz="1500" b="0">
+                <a:solidFill>
+                  <a:srgbClr val="56657B"/>
+                </a:solidFill>
+                <a:latin typeface="Aptos"/>
+              </a:rPr>
+              <a:t>Students create their own version and improve through iteration.</a:t>
+            </a:r>
+          </a:p>
+        </p:txBody>
+      </p:sp>
+      <p:sp>
+        <p:nvSpPr>
+          <p:cNvPr id="8" name="TextBox 7"/>
+          <p:cNvSpPr txBox="1"/>
+          <p:nvPr/>
+        </p:nvSpPr>
+        <p:spPr>
+          <a:xfrm>
+            <a:off x="411480" y="6519672"/>
+            <a:ext cx="5303520" cy="164592"/>
+          </a:xfrm>
+          <a:prstGeom prst="rect">
+            <a:avLst/>
+          </a:prstGeom>
+          <a:noFill/>
+        </p:spPr>
+        <p:txBody>
+          <a:bodyPr wrap="square" anchor="t">
+            <a:spAutoFit/>
+          </a:bodyPr>
+          <a:lstStyle/>
+          <a:p>
+            <a:r>
+              <a:rPr sz="850" b="0">
+                <a:solidFill>
+                  <a:srgbClr val="56657B"/>
+                </a:solidFill>
+                <a:latin typeface="Aptos"/>
+              </a:rPr>
+              <a:t>AI Builders Academy | Week 1</a:t>
+            </a:r>
+          </a:p>
+        </p:txBody>
+      </p:sp>
+      <p:sp>
+        <p:nvSpPr>
+          <p:cNvPr id="9" name="TextBox 8"/>
+          <p:cNvSpPr txBox="1"/>
+          <p:nvPr/>
+        </p:nvSpPr>
+        <p:spPr>
+          <a:xfrm>
+            <a:off x="10972800" y="6519672"/>
+            <a:ext cx="822960" cy="164592"/>
+          </a:xfrm>
+          <a:prstGeom prst="rect">
+            <a:avLst/>
+          </a:prstGeom>
+          <a:noFill/>
+        </p:spPr>
+        <p:txBody>
+          <a:bodyPr wrap="square" anchor="t">
+            <a:spAutoFit/>
+          </a:bodyPr>
+          <a:lstStyle/>
+          <a:p>
+            <a:pPr algn="r"/>
+            <a:r>
+              <a:rPr sz="850" b="0">
+                <a:solidFill>
+                  <a:srgbClr val="56657B"/>
+                </a:solidFill>
+                <a:latin typeface="Aptos"/>
+              </a:rPr>
+              <a:t>7/9</a:t>
+            </a:r>
+          </a:p>
+        </p:txBody>
+      </p:sp>
+      <p:sp>
+        <p:nvSpPr>
+          <p:cNvPr id="10" name="Rounded Rectangle 9"/>
+          <p:cNvSpPr/>
+          <p:nvPr/>
+        </p:nvSpPr>
+        <p:spPr>
+          <a:xfrm>
+            <a:off x="868680" y="1828800"/>
+            <a:ext cx="4983480" cy="3246120"/>
+          </a:xfrm>
+          <a:prstGeom prst="roundRect">
+            <a:avLst/>
+          </a:prstGeom>
+          <a:solidFill>
+            <a:srgbClr val="ECFDF5"/>
+          </a:solidFill>
+          <a:ln>
+            <a:solidFill>
+              <a:srgbClr val="D9E2EE"/>
+            </a:solidFill>
+          </a:ln>
+        </p:spPr>
+        <p:style>
+          <a:lnRef idx="1">
+            <a:schemeClr val="accent1"/>
+          </a:lnRef>
+          <a:fillRef idx="3">
+            <a:schemeClr val="accent1"/>
+          </a:fillRef>
+          <a:effectRef idx="2">
+            <a:schemeClr val="accent1"/>
+          </a:effectRef>
+          <a:fontRef idx="minor">
+            <a:schemeClr val="lt1"/>
+          </a:fontRef>
+        </p:style>
+        <p:txBody>
+          <a:bodyPr rtlCol="0" anchor="ctr"/>
+          <a:lstStyle/>
+          <a:p>
+            <a:pPr algn="ctr"/>
+          </a:p>
+        </p:txBody>
+      </p:sp>
+      <p:sp>
+        <p:nvSpPr>
+          <p:cNvPr id="11" name="Rectangle 10"/>
+          <p:cNvSpPr/>
+          <p:nvPr/>
+        </p:nvSpPr>
+        <p:spPr>
+          <a:xfrm>
+            <a:off x="868680" y="1828800"/>
+            <a:ext cx="73152" cy="3246120"/>
           </a:xfrm>
           <a:prstGeom prst="rect">
             <a:avLst/>
@@ -3500,8 +6861,8 @@
         </p:nvSpPr>
         <p:spPr>
           <a:xfrm>
-            <a:off x="3502152" y="996695"/>
-            <a:ext cx="2020824" cy="219456"/>
+            <a:off x="1033271" y="1956816"/>
+            <a:ext cx="4663440" cy="219456"/>
           </a:xfrm>
           <a:prstGeom prst="rect">
             <a:avLst/>
@@ -3521,7 +6882,7 @@
                 </a:solidFill>
                 <a:latin typeface="Aptos"/>
               </a:rPr>
-              <a:t>Student output</a:t>
+              <a:t>Build steps</a:t>
             </a:r>
           </a:p>
         </p:txBody>
@@ -3534,28 +6895,81 @@
         </p:nvSpPr>
         <p:spPr>
           <a:xfrm>
-            <a:off x="3502152" y="1289304"/>
-            <a:ext cx="2020824" cy="594359"/>
-          </a:xfrm>
-          <a:prstGeom prst="rect">
-            <a:avLst/>
-          </a:prstGeom>
-          <a:noFill/>
-        </p:spPr>
-        <p:txBody>
-          <a:bodyPr wrap="square" anchor="t">
-            <a:spAutoFit/>
-          </a:bodyPr>
-          <a:lstStyle/>
-          <a:p>
-            <a:r>
-              <a:rPr sz="1220" b="0">
+            <a:off x="1069848" y="2267712"/>
+            <a:ext cx="4599432" cy="2743200"/>
+          </a:xfrm>
+          <a:prstGeom prst="rect">
+            <a:avLst/>
+          </a:prstGeom>
+          <a:noFill/>
+        </p:spPr>
+        <p:txBody>
+          <a:bodyPr wrap="square">
+            <a:spAutoFit/>
+          </a:bodyPr>
+          <a:lstStyle/>
+          <a:p>
+            <a:pPr>
+              <a:spcAft>
+                <a:spcPts val="900"/>
+              </a:spcAft>
+              <a:defRPr sz="1400">
                 <a:solidFill>
                   <a:srgbClr val="172033"/>
                 </a:solidFill>
                 <a:latin typeface="Aptos"/>
-              </a:rPr>
-              <a:t>Personal AI assistant with 5 example conversations.</a:t>
+              </a:defRPr>
+            </a:pPr>
+            <a:r>
+              <a:t>Choose an assistant type: Study Buddy, Minecraft Coach, Music Advisor, Sports Trainer, or Writing Helper.</a:t>
+            </a:r>
+          </a:p>
+          <a:p>
+            <a:pPr>
+              <a:spcAft>
+                <a:spcPts val="900"/>
+              </a:spcAft>
+              <a:defRPr sz="1400">
+                <a:solidFill>
+                  <a:srgbClr val="172033"/>
+                </a:solidFill>
+                <a:latin typeface="Aptos"/>
+              </a:defRPr>
+            </a:pPr>
+            <a:r>
+              <a:t>Create the assistant's role and rules.</a:t>
+            </a:r>
+          </a:p>
+          <a:p>
+            <a:pPr>
+              <a:spcAft>
+                <a:spcPts val="900"/>
+              </a:spcAft>
+              <a:defRPr sz="1400">
+                <a:solidFill>
+                  <a:srgbClr val="172033"/>
+                </a:solidFill>
+                <a:latin typeface="Aptos"/>
+              </a:defRPr>
+            </a:pPr>
+            <a:r>
+              <a:t>Test it with 3 questions.</a:t>
+            </a:r>
+          </a:p>
+          <a:p>
+            <a:pPr>
+              <a:spcAft>
+                <a:spcPts val="900"/>
+              </a:spcAft>
+              <a:defRPr sz="1400">
+                <a:solidFill>
+                  <a:srgbClr val="172033"/>
+                </a:solidFill>
+                <a:latin typeface="Aptos"/>
+              </a:defRPr>
+            </a:pPr>
+            <a:r>
+              <a:t>Improve the prompt after seeing the answers.</a:t>
             </a:r>
           </a:p>
         </p:txBody>
@@ -3568,8 +6982,1178 @@
         </p:nvSpPr>
         <p:spPr>
           <a:xfrm>
-            <a:off x="5852160" y="877824"/>
-            <a:ext cx="5897880" cy="1051560"/>
+            <a:off x="6172200" y="1828800"/>
+            <a:ext cx="4983480" cy="3246120"/>
+          </a:xfrm>
+          <a:prstGeom prst="roundRect">
+            <a:avLst/>
+          </a:prstGeom>
+          <a:solidFill>
+            <a:srgbClr val="FFFFFF"/>
+          </a:solidFill>
+          <a:ln>
+            <a:solidFill>
+              <a:srgbClr val="D9E2EE"/>
+            </a:solidFill>
+          </a:ln>
+        </p:spPr>
+        <p:style>
+          <a:lnRef idx="1">
+            <a:schemeClr val="accent1"/>
+          </a:lnRef>
+          <a:fillRef idx="3">
+            <a:schemeClr val="accent1"/>
+          </a:fillRef>
+          <a:effectRef idx="2">
+            <a:schemeClr val="accent1"/>
+          </a:effectRef>
+          <a:fontRef idx="minor">
+            <a:schemeClr val="lt1"/>
+          </a:fontRef>
+        </p:style>
+        <p:txBody>
+          <a:bodyPr rtlCol="0" anchor="ctr"/>
+          <a:lstStyle/>
+          <a:p>
+            <a:pPr algn="ctr"/>
+          </a:p>
+        </p:txBody>
+      </p:sp>
+      <p:sp>
+        <p:nvSpPr>
+          <p:cNvPr id="15" name="Rectangle 14"/>
+          <p:cNvSpPr/>
+          <p:nvPr/>
+        </p:nvSpPr>
+        <p:spPr>
+          <a:xfrm>
+            <a:off x="6172200" y="1828800"/>
+            <a:ext cx="73152" cy="3246120"/>
+          </a:xfrm>
+          <a:prstGeom prst="rect">
+            <a:avLst/>
+          </a:prstGeom>
+          <a:solidFill>
+            <a:srgbClr val="2563EB"/>
+          </a:solidFill>
+          <a:ln>
+            <a:solidFill>
+              <a:srgbClr val="2563EB"/>
+            </a:solidFill>
+          </a:ln>
+        </p:spPr>
+        <p:style>
+          <a:lnRef idx="1">
+            <a:schemeClr val="accent1"/>
+          </a:lnRef>
+          <a:fillRef idx="3">
+            <a:schemeClr val="accent1"/>
+          </a:fillRef>
+          <a:effectRef idx="2">
+            <a:schemeClr val="accent1"/>
+          </a:effectRef>
+          <a:fontRef idx="minor">
+            <a:schemeClr val="lt1"/>
+          </a:fontRef>
+        </p:style>
+        <p:txBody>
+          <a:bodyPr rtlCol="0" anchor="ctr"/>
+          <a:lstStyle/>
+          <a:p>
+            <a:pPr algn="ctr"/>
+          </a:p>
+        </p:txBody>
+      </p:sp>
+      <p:sp>
+        <p:nvSpPr>
+          <p:cNvPr id="16" name="TextBox 15"/>
+          <p:cNvSpPr txBox="1"/>
+          <p:nvPr/>
+        </p:nvSpPr>
+        <p:spPr>
+          <a:xfrm>
+            <a:off x="6336792" y="1956816"/>
+            <a:ext cx="4663440" cy="219456"/>
+          </a:xfrm>
+          <a:prstGeom prst="rect">
+            <a:avLst/>
+          </a:prstGeom>
+          <a:noFill/>
+        </p:spPr>
+        <p:txBody>
+          <a:bodyPr wrap="square" anchor="t">
+            <a:spAutoFit/>
+          </a:bodyPr>
+          <a:lstStyle/>
+          <a:p>
+            <a:r>
+              <a:rPr sz="1300" b="1">
+                <a:solidFill>
+                  <a:srgbClr val="2563EB"/>
+                </a:solidFill>
+                <a:latin typeface="Aptos"/>
+              </a:rPr>
+              <a:t>Keep it manageable</a:t>
+            </a:r>
+          </a:p>
+        </p:txBody>
+      </p:sp>
+      <p:sp>
+        <p:nvSpPr>
+          <p:cNvPr id="17" name="TextBox 16"/>
+          <p:cNvSpPr txBox="1"/>
+          <p:nvPr/>
+        </p:nvSpPr>
+        <p:spPr>
+          <a:xfrm>
+            <a:off x="6373368" y="2267712"/>
+            <a:ext cx="4599432" cy="2743200"/>
+          </a:xfrm>
+          <a:prstGeom prst="rect">
+            <a:avLst/>
+          </a:prstGeom>
+          <a:noFill/>
+        </p:spPr>
+        <p:txBody>
+          <a:bodyPr wrap="square">
+            <a:spAutoFit/>
+          </a:bodyPr>
+          <a:lstStyle/>
+          <a:p>
+            <a:pPr>
+              <a:spcAft>
+                <a:spcPts val="900"/>
+              </a:spcAft>
+              <a:defRPr sz="1400">
+                <a:solidFill>
+                  <a:srgbClr val="172033"/>
+                </a:solidFill>
+                <a:latin typeface="Aptos"/>
+              </a:defRPr>
+            </a:pPr>
+            <a:r>
+              <a:t>Start with the smallest working version.</a:t>
+            </a:r>
+          </a:p>
+          <a:p>
+            <a:pPr>
+              <a:spcAft>
+                <a:spcPts val="900"/>
+              </a:spcAft>
+              <a:defRPr sz="1400">
+                <a:solidFill>
+                  <a:srgbClr val="172033"/>
+                </a:solidFill>
+                <a:latin typeface="Aptos"/>
+              </a:defRPr>
+            </a:pPr>
+            <a:r>
+              <a:t>Let students customize one thing.</a:t>
+            </a:r>
+          </a:p>
+          <a:p>
+            <a:pPr>
+              <a:spcAft>
+                <a:spcPts val="900"/>
+              </a:spcAft>
+              <a:defRPr sz="1400">
+                <a:solidFill>
+                  <a:srgbClr val="172033"/>
+                </a:solidFill>
+                <a:latin typeface="Aptos"/>
+              </a:defRPr>
+            </a:pPr>
+            <a:r>
+              <a:t>Have them explain the change in plain English.</a:t>
+            </a:r>
+          </a:p>
+        </p:txBody>
+      </p:sp>
+    </p:spTree>
+  </p:cSld>
+  <p:clrMapOvr>
+    <a:masterClrMapping/>
+  </p:clrMapOvr>
+</p:sld>
+</file>
+
+<file path=ppt/slides/slide8.xml><?xml version="1.0" encoding="utf-8"?>
+<p:sld xmlns:a="http://schemas.openxmlformats.org/drawingml/2006/main" xmlns:p="http://schemas.openxmlformats.org/presentationml/2006/main" xmlns:r="http://schemas.openxmlformats.org/officeDocument/2006/relationships">
+  <p:cSld>
+    <p:bg>
+      <p:bgPr>
+        <a:solidFill>
+          <a:srgbClr val="F4F7FB"/>
+        </a:solidFill>
+        <a:effectLst/>
+      </p:bgPr>
+    </p:bg>
+    <p:spTree>
+      <p:nvGrpSpPr>
+        <p:cNvPr id="1" name=""/>
+        <p:cNvGrpSpPr/>
+        <p:nvPr/>
+      </p:nvGrpSpPr>
+      <p:grpSpPr/>
+      <p:sp>
+        <p:nvSpPr>
+          <p:cNvPr id="2" name="Rectangle 1"/>
+          <p:cNvSpPr/>
+          <p:nvPr/>
+        </p:nvSpPr>
+        <p:spPr>
+          <a:xfrm>
+            <a:off x="0" y="0"/>
+            <a:ext cx="12191695" cy="658368"/>
+          </a:xfrm>
+          <a:prstGeom prst="rect">
+            <a:avLst/>
+          </a:prstGeom>
+          <a:solidFill>
+            <a:srgbClr val="2563EB"/>
+          </a:solidFill>
+          <a:ln>
+            <a:solidFill>
+              <a:srgbClr val="2563EB"/>
+            </a:solidFill>
+          </a:ln>
+        </p:spPr>
+        <p:style>
+          <a:lnRef idx="1">
+            <a:schemeClr val="accent1"/>
+          </a:lnRef>
+          <a:fillRef idx="3">
+            <a:schemeClr val="accent1"/>
+          </a:fillRef>
+          <a:effectRef idx="2">
+            <a:schemeClr val="accent1"/>
+          </a:effectRef>
+          <a:fontRef idx="minor">
+            <a:schemeClr val="lt1"/>
+          </a:fontRef>
+        </p:style>
+        <p:txBody>
+          <a:bodyPr rtlCol="0" anchor="ctr"/>
+          <a:lstStyle/>
+          <a:p>
+            <a:pPr algn="ctr"/>
+          </a:p>
+        </p:txBody>
+      </p:sp>
+      <p:sp>
+        <p:nvSpPr>
+          <p:cNvPr id="3" name="TextBox 2"/>
+          <p:cNvSpPr txBox="1"/>
+          <p:nvPr/>
+        </p:nvSpPr>
+        <p:spPr>
+          <a:xfrm>
+            <a:off x="502920" y="164592"/>
+            <a:ext cx="1143000" cy="201168"/>
+          </a:xfrm>
+          <a:prstGeom prst="rect">
+            <a:avLst/>
+          </a:prstGeom>
+          <a:noFill/>
+        </p:spPr>
+        <p:txBody>
+          <a:bodyPr wrap="square" anchor="t">
+            <a:spAutoFit/>
+          </a:bodyPr>
+          <a:lstStyle/>
+          <a:p>
+            <a:r>
+              <a:rPr sz="1100" b="1">
+                <a:solidFill>
+                  <a:srgbClr val="FFFFFF"/>
+                </a:solidFill>
+                <a:latin typeface="Aptos"/>
+              </a:rPr>
+              <a:t>WEEK 1</a:t>
+            </a:r>
+          </a:p>
+        </p:txBody>
+      </p:sp>
+      <p:sp>
+        <p:nvSpPr>
+          <p:cNvPr id="4" name="TextBox 3"/>
+          <p:cNvSpPr txBox="1"/>
+          <p:nvPr/>
+        </p:nvSpPr>
+        <p:spPr>
+          <a:xfrm>
+            <a:off x="1572768" y="109728"/>
+            <a:ext cx="6492240" cy="320040"/>
+          </a:xfrm>
+          <a:prstGeom prst="rect">
+            <a:avLst/>
+          </a:prstGeom>
+          <a:noFill/>
+        </p:spPr>
+        <p:txBody>
+          <a:bodyPr wrap="square" anchor="t">
+            <a:spAutoFit/>
+          </a:bodyPr>
+          <a:lstStyle/>
+          <a:p>
+            <a:r>
+              <a:rPr sz="2000" b="1">
+                <a:solidFill>
+                  <a:srgbClr val="FFFFFF"/>
+                </a:solidFill>
+                <a:latin typeface="Aptos"/>
+              </a:rPr>
+              <a:t>Meet Your AI Teammate</a:t>
+            </a:r>
+          </a:p>
+        </p:txBody>
+      </p:sp>
+      <p:sp>
+        <p:nvSpPr>
+          <p:cNvPr id="5" name="TextBox 4"/>
+          <p:cNvSpPr txBox="1"/>
+          <p:nvPr/>
+        </p:nvSpPr>
+        <p:spPr>
+          <a:xfrm>
+            <a:off x="7909560" y="173736"/>
+            <a:ext cx="3749039" cy="182880"/>
+          </a:xfrm>
+          <a:prstGeom prst="rect">
+            <a:avLst/>
+          </a:prstGeom>
+          <a:noFill/>
+        </p:spPr>
+        <p:txBody>
+          <a:bodyPr wrap="square" anchor="t">
+            <a:spAutoFit/>
+          </a:bodyPr>
+          <a:lstStyle/>
+          <a:p>
+            <a:pPr algn="r"/>
+            <a:r>
+              <a:rPr sz="1050" b="0">
+                <a:solidFill>
+                  <a:srgbClr val="FFFFFF"/>
+                </a:solidFill>
+                <a:latin typeface="Aptos"/>
+              </a:rPr>
+              <a:t>ChatGPT Basics</a:t>
+            </a:r>
+          </a:p>
+        </p:txBody>
+      </p:sp>
+      <p:sp>
+        <p:nvSpPr>
+          <p:cNvPr id="6" name="TextBox 5"/>
+          <p:cNvSpPr txBox="1"/>
+          <p:nvPr/>
+        </p:nvSpPr>
+        <p:spPr>
+          <a:xfrm>
+            <a:off x="658368" y="932688"/>
+            <a:ext cx="10698480" cy="475488"/>
+          </a:xfrm>
+          <a:prstGeom prst="rect">
+            <a:avLst/>
+          </a:prstGeom>
+          <a:noFill/>
+        </p:spPr>
+        <p:txBody>
+          <a:bodyPr wrap="square" anchor="t">
+            <a:spAutoFit/>
+          </a:bodyPr>
+          <a:lstStyle/>
+          <a:p>
+            <a:r>
+              <a:rPr sz="3100" b="1">
+                <a:solidFill>
+                  <a:srgbClr val="172033"/>
+                </a:solidFill>
+                <a:latin typeface="Aptos"/>
+              </a:rPr>
+              <a:t>Interactive checkpoints</a:t>
+            </a:r>
+          </a:p>
+        </p:txBody>
+      </p:sp>
+      <p:sp>
+        <p:nvSpPr>
+          <p:cNvPr id="7" name="TextBox 6"/>
+          <p:cNvSpPr txBox="1"/>
+          <p:nvPr/>
+        </p:nvSpPr>
+        <p:spPr>
+          <a:xfrm>
+            <a:off x="694944" y="1481328"/>
+            <a:ext cx="10424160" cy="256032"/>
+          </a:xfrm>
+          <a:prstGeom prst="rect">
+            <a:avLst/>
+          </a:prstGeom>
+          <a:noFill/>
+        </p:spPr>
+        <p:txBody>
+          <a:bodyPr wrap="square" anchor="t">
+            <a:spAutoFit/>
+          </a:bodyPr>
+          <a:lstStyle/>
+          <a:p>
+            <a:r>
+              <a:rPr sz="1500" b="0">
+                <a:solidFill>
+                  <a:srgbClr val="56657B"/>
+                </a:solidFill>
+                <a:latin typeface="Aptos"/>
+              </a:rPr>
+              <a:t>Use these to keep kids active instead of just watching.</a:t>
+            </a:r>
+          </a:p>
+        </p:txBody>
+      </p:sp>
+      <p:sp>
+        <p:nvSpPr>
+          <p:cNvPr id="8" name="TextBox 7"/>
+          <p:cNvSpPr txBox="1"/>
+          <p:nvPr/>
+        </p:nvSpPr>
+        <p:spPr>
+          <a:xfrm>
+            <a:off x="411480" y="6519672"/>
+            <a:ext cx="5303520" cy="164592"/>
+          </a:xfrm>
+          <a:prstGeom prst="rect">
+            <a:avLst/>
+          </a:prstGeom>
+          <a:noFill/>
+        </p:spPr>
+        <p:txBody>
+          <a:bodyPr wrap="square" anchor="t">
+            <a:spAutoFit/>
+          </a:bodyPr>
+          <a:lstStyle/>
+          <a:p>
+            <a:r>
+              <a:rPr sz="850" b="0">
+                <a:solidFill>
+                  <a:srgbClr val="56657B"/>
+                </a:solidFill>
+                <a:latin typeface="Aptos"/>
+              </a:rPr>
+              <a:t>AI Builders Academy | Week 1</a:t>
+            </a:r>
+          </a:p>
+        </p:txBody>
+      </p:sp>
+      <p:sp>
+        <p:nvSpPr>
+          <p:cNvPr id="9" name="TextBox 8"/>
+          <p:cNvSpPr txBox="1"/>
+          <p:nvPr/>
+        </p:nvSpPr>
+        <p:spPr>
+          <a:xfrm>
+            <a:off x="10972800" y="6519672"/>
+            <a:ext cx="822960" cy="164592"/>
+          </a:xfrm>
+          <a:prstGeom prst="rect">
+            <a:avLst/>
+          </a:prstGeom>
+          <a:noFill/>
+        </p:spPr>
+        <p:txBody>
+          <a:bodyPr wrap="square" anchor="t">
+            <a:spAutoFit/>
+          </a:bodyPr>
+          <a:lstStyle/>
+          <a:p>
+            <a:pPr algn="r"/>
+            <a:r>
+              <a:rPr sz="850" b="0">
+                <a:solidFill>
+                  <a:srgbClr val="56657B"/>
+                </a:solidFill>
+                <a:latin typeface="Aptos"/>
+              </a:rPr>
+              <a:t>8/9</a:t>
+            </a:r>
+          </a:p>
+        </p:txBody>
+      </p:sp>
+      <p:sp>
+        <p:nvSpPr>
+          <p:cNvPr id="10" name="Rounded Rectangle 9"/>
+          <p:cNvSpPr/>
+          <p:nvPr/>
+        </p:nvSpPr>
+        <p:spPr>
+          <a:xfrm>
+            <a:off x="914400" y="1828800"/>
+            <a:ext cx="10241280" cy="2103120"/>
+          </a:xfrm>
+          <a:prstGeom prst="roundRect">
+            <a:avLst/>
+          </a:prstGeom>
+          <a:solidFill>
+            <a:srgbClr val="F5F3FF"/>
+          </a:solidFill>
+          <a:ln>
+            <a:solidFill>
+              <a:srgbClr val="D9E2EE"/>
+            </a:solidFill>
+          </a:ln>
+        </p:spPr>
+        <p:style>
+          <a:lnRef idx="1">
+            <a:schemeClr val="accent1"/>
+          </a:lnRef>
+          <a:fillRef idx="3">
+            <a:schemeClr val="accent1"/>
+          </a:fillRef>
+          <a:effectRef idx="2">
+            <a:schemeClr val="accent1"/>
+          </a:effectRef>
+          <a:fontRef idx="minor">
+            <a:schemeClr val="lt1"/>
+          </a:fontRef>
+        </p:style>
+        <p:txBody>
+          <a:bodyPr rtlCol="0" anchor="ctr"/>
+          <a:lstStyle/>
+          <a:p>
+            <a:pPr algn="ctr"/>
+          </a:p>
+        </p:txBody>
+      </p:sp>
+      <p:sp>
+        <p:nvSpPr>
+          <p:cNvPr id="11" name="Rectangle 10"/>
+          <p:cNvSpPr/>
+          <p:nvPr/>
+        </p:nvSpPr>
+        <p:spPr>
+          <a:xfrm>
+            <a:off x="914400" y="1828800"/>
+            <a:ext cx="73152" cy="2103120"/>
+          </a:xfrm>
+          <a:prstGeom prst="rect">
+            <a:avLst/>
+          </a:prstGeom>
+          <a:solidFill>
+            <a:srgbClr val="7C3AED"/>
+          </a:solidFill>
+          <a:ln>
+            <a:solidFill>
+              <a:srgbClr val="7C3AED"/>
+            </a:solidFill>
+          </a:ln>
+        </p:spPr>
+        <p:style>
+          <a:lnRef idx="1">
+            <a:schemeClr val="accent1"/>
+          </a:lnRef>
+          <a:fillRef idx="3">
+            <a:schemeClr val="accent1"/>
+          </a:fillRef>
+          <a:effectRef idx="2">
+            <a:schemeClr val="accent1"/>
+          </a:effectRef>
+          <a:fontRef idx="minor">
+            <a:schemeClr val="lt1"/>
+          </a:fontRef>
+        </p:style>
+        <p:txBody>
+          <a:bodyPr rtlCol="0" anchor="ctr"/>
+          <a:lstStyle/>
+          <a:p>
+            <a:pPr algn="ctr"/>
+          </a:p>
+        </p:txBody>
+      </p:sp>
+      <p:sp>
+        <p:nvSpPr>
+          <p:cNvPr id="12" name="TextBox 11"/>
+          <p:cNvSpPr txBox="1"/>
+          <p:nvPr/>
+        </p:nvSpPr>
+        <p:spPr>
+          <a:xfrm>
+            <a:off x="1078992" y="1956816"/>
+            <a:ext cx="9921240" cy="219456"/>
+          </a:xfrm>
+          <a:prstGeom prst="rect">
+            <a:avLst/>
+          </a:prstGeom>
+          <a:noFill/>
+        </p:spPr>
+        <p:txBody>
+          <a:bodyPr wrap="square" anchor="t">
+            <a:spAutoFit/>
+          </a:bodyPr>
+          <a:lstStyle/>
+          <a:p>
+            <a:r>
+              <a:rPr sz="1300" b="1">
+                <a:solidFill>
+                  <a:srgbClr val="7C3AED"/>
+                </a:solidFill>
+                <a:latin typeface="Aptos"/>
+              </a:rPr>
+              <a:t>Student interaction</a:t>
+            </a:r>
+          </a:p>
+        </p:txBody>
+      </p:sp>
+      <p:sp>
+        <p:nvSpPr>
+          <p:cNvPr id="13" name="TextBox 12"/>
+          <p:cNvSpPr txBox="1"/>
+          <p:nvPr/>
+        </p:nvSpPr>
+        <p:spPr>
+          <a:xfrm>
+            <a:off x="1115568" y="2267712"/>
+            <a:ext cx="9857232" cy="1600199"/>
+          </a:xfrm>
+          <a:prstGeom prst="rect">
+            <a:avLst/>
+          </a:prstGeom>
+          <a:noFill/>
+        </p:spPr>
+        <p:txBody>
+          <a:bodyPr wrap="square">
+            <a:spAutoFit/>
+          </a:bodyPr>
+          <a:lstStyle/>
+          <a:p>
+            <a:pPr>
+              <a:spcAft>
+                <a:spcPts val="900"/>
+              </a:spcAft>
+              <a:defRPr sz="1400">
+                <a:solidFill>
+                  <a:srgbClr val="172033"/>
+                </a:solidFill>
+                <a:latin typeface="Aptos"/>
+              </a:defRPr>
+            </a:pPr>
+            <a:r>
+              <a:t>Thumb vote: helpful or lazy?</a:t>
+            </a:r>
+          </a:p>
+          <a:p>
+            <a:pPr>
+              <a:spcAft>
+                <a:spcPts val="900"/>
+              </a:spcAft>
+              <a:defRPr sz="1400">
+                <a:solidFill>
+                  <a:srgbClr val="172033"/>
+                </a:solidFill>
+                <a:latin typeface="Aptos"/>
+              </a:defRPr>
+            </a:pPr>
+            <a:r>
+              <a:t>Pair test: ask your partner's assistant one question.</a:t>
+            </a:r>
+          </a:p>
+          <a:p>
+            <a:pPr>
+              <a:spcAft>
+                <a:spcPts val="900"/>
+              </a:spcAft>
+              <a:defRPr sz="1400">
+                <a:solidFill>
+                  <a:srgbClr val="172033"/>
+                </a:solidFill>
+                <a:latin typeface="Aptos"/>
+              </a:defRPr>
+            </a:pPr>
+            <a:r>
+              <a:t>Repair challenge: turn a vague prompt into a clear prompt.</a:t>
+            </a:r>
+          </a:p>
+        </p:txBody>
+      </p:sp>
+      <p:sp>
+        <p:nvSpPr>
+          <p:cNvPr id="14" name="Rounded Rectangle 13"/>
+          <p:cNvSpPr/>
+          <p:nvPr/>
+        </p:nvSpPr>
+        <p:spPr>
+          <a:xfrm>
+            <a:off x="914400" y="4343400"/>
+            <a:ext cx="10241280" cy="868680"/>
+          </a:xfrm>
+          <a:prstGeom prst="roundRect">
+            <a:avLst/>
+          </a:prstGeom>
+          <a:solidFill>
+            <a:srgbClr val="ECFDF5"/>
+          </a:solidFill>
+          <a:ln>
+            <a:solidFill>
+              <a:srgbClr val="D9E2EE"/>
+            </a:solidFill>
+          </a:ln>
+        </p:spPr>
+        <p:style>
+          <a:lnRef idx="1">
+            <a:schemeClr val="accent1"/>
+          </a:lnRef>
+          <a:fillRef idx="3">
+            <a:schemeClr val="accent1"/>
+          </a:fillRef>
+          <a:effectRef idx="2">
+            <a:schemeClr val="accent1"/>
+          </a:effectRef>
+          <a:fontRef idx="minor">
+            <a:schemeClr val="lt1"/>
+          </a:fontRef>
+        </p:style>
+        <p:txBody>
+          <a:bodyPr rtlCol="0" anchor="ctr"/>
+          <a:lstStyle/>
+          <a:p>
+            <a:pPr algn="ctr"/>
+          </a:p>
+        </p:txBody>
+      </p:sp>
+      <p:sp>
+        <p:nvSpPr>
+          <p:cNvPr id="15" name="Rectangle 14"/>
+          <p:cNvSpPr/>
+          <p:nvPr/>
+        </p:nvSpPr>
+        <p:spPr>
+          <a:xfrm>
+            <a:off x="914400" y="4343400"/>
+            <a:ext cx="73152" cy="868680"/>
+          </a:xfrm>
+          <a:prstGeom prst="rect">
+            <a:avLst/>
+          </a:prstGeom>
+          <a:solidFill>
+            <a:srgbClr val="0F9F6E"/>
+          </a:solidFill>
+          <a:ln>
+            <a:solidFill>
+              <a:srgbClr val="0F9F6E"/>
+            </a:solidFill>
+          </a:ln>
+        </p:spPr>
+        <p:style>
+          <a:lnRef idx="1">
+            <a:schemeClr val="accent1"/>
+          </a:lnRef>
+          <a:fillRef idx="3">
+            <a:schemeClr val="accent1"/>
+          </a:fillRef>
+          <a:effectRef idx="2">
+            <a:schemeClr val="accent1"/>
+          </a:effectRef>
+          <a:fontRef idx="minor">
+            <a:schemeClr val="lt1"/>
+          </a:fontRef>
+        </p:style>
+        <p:txBody>
+          <a:bodyPr rtlCol="0" anchor="ctr"/>
+          <a:lstStyle/>
+          <a:p>
+            <a:pPr algn="ctr"/>
+          </a:p>
+        </p:txBody>
+      </p:sp>
+      <p:sp>
+        <p:nvSpPr>
+          <p:cNvPr id="16" name="TextBox 15"/>
+          <p:cNvSpPr txBox="1"/>
+          <p:nvPr/>
+        </p:nvSpPr>
+        <p:spPr>
+          <a:xfrm>
+            <a:off x="1078992" y="4471416"/>
+            <a:ext cx="9921240" cy="219456"/>
+          </a:xfrm>
+          <a:prstGeom prst="rect">
+            <a:avLst/>
+          </a:prstGeom>
+          <a:noFill/>
+        </p:spPr>
+        <p:txBody>
+          <a:bodyPr wrap="square" anchor="t">
+            <a:spAutoFit/>
+          </a:bodyPr>
+          <a:lstStyle/>
+          <a:p>
+            <a:r>
+              <a:rPr sz="1300" b="1">
+                <a:solidFill>
+                  <a:srgbClr val="0F9F6E"/>
+                </a:solidFill>
+                <a:latin typeface="Aptos"/>
+              </a:rPr>
+              <a:t>Exit ticket</a:t>
+            </a:r>
+          </a:p>
+        </p:txBody>
+      </p:sp>
+      <p:sp>
+        <p:nvSpPr>
+          <p:cNvPr id="17" name="TextBox 16"/>
+          <p:cNvSpPr txBox="1"/>
+          <p:nvPr/>
+        </p:nvSpPr>
+        <p:spPr>
+          <a:xfrm>
+            <a:off x="1078992" y="4782312"/>
+            <a:ext cx="9912096" cy="365759"/>
+          </a:xfrm>
+          <a:prstGeom prst="rect">
+            <a:avLst/>
+          </a:prstGeom>
+          <a:noFill/>
+        </p:spPr>
+        <p:txBody>
+          <a:bodyPr wrap="square" anchor="t">
+            <a:spAutoFit/>
+          </a:bodyPr>
+          <a:lstStyle/>
+          <a:p>
+            <a:r>
+              <a:rPr sz="1400" b="0">
+                <a:solidFill>
+                  <a:srgbClr val="172033"/>
+                </a:solidFill>
+                <a:latin typeface="Aptos"/>
+              </a:rPr>
+              <a:t>What did you make? What prompt helped? What would you change next?</a:t>
+            </a:r>
+          </a:p>
+        </p:txBody>
+      </p:sp>
+    </p:spTree>
+  </p:cSld>
+  <p:clrMapOvr>
+    <a:masterClrMapping/>
+  </p:clrMapOvr>
+</p:sld>
+</file>
+
+<file path=ppt/slides/slide9.xml><?xml version="1.0" encoding="utf-8"?>
+<p:sld xmlns:a="http://schemas.openxmlformats.org/drawingml/2006/main" xmlns:p="http://schemas.openxmlformats.org/presentationml/2006/main" xmlns:r="http://schemas.openxmlformats.org/officeDocument/2006/relationships">
+  <p:cSld>
+    <p:bg>
+      <p:bgPr>
+        <a:solidFill>
+          <a:srgbClr val="F4F7FB"/>
+        </a:solidFill>
+        <a:effectLst/>
+      </p:bgPr>
+    </p:bg>
+    <p:spTree>
+      <p:nvGrpSpPr>
+        <p:cNvPr id="1" name=""/>
+        <p:cNvGrpSpPr/>
+        <p:nvPr/>
+      </p:nvGrpSpPr>
+      <p:grpSpPr/>
+      <p:sp>
+        <p:nvSpPr>
+          <p:cNvPr id="2" name="Rectangle 1"/>
+          <p:cNvSpPr/>
+          <p:nvPr/>
+        </p:nvSpPr>
+        <p:spPr>
+          <a:xfrm>
+            <a:off x="0" y="0"/>
+            <a:ext cx="12191695" cy="658368"/>
+          </a:xfrm>
+          <a:prstGeom prst="rect">
+            <a:avLst/>
+          </a:prstGeom>
+          <a:solidFill>
+            <a:srgbClr val="2563EB"/>
+          </a:solidFill>
+          <a:ln>
+            <a:solidFill>
+              <a:srgbClr val="2563EB"/>
+            </a:solidFill>
+          </a:ln>
+        </p:spPr>
+        <p:style>
+          <a:lnRef idx="1">
+            <a:schemeClr val="accent1"/>
+          </a:lnRef>
+          <a:fillRef idx="3">
+            <a:schemeClr val="accent1"/>
+          </a:fillRef>
+          <a:effectRef idx="2">
+            <a:schemeClr val="accent1"/>
+          </a:effectRef>
+          <a:fontRef idx="minor">
+            <a:schemeClr val="lt1"/>
+          </a:fontRef>
+        </p:style>
+        <p:txBody>
+          <a:bodyPr rtlCol="0" anchor="ctr"/>
+          <a:lstStyle/>
+          <a:p>
+            <a:pPr algn="ctr"/>
+          </a:p>
+        </p:txBody>
+      </p:sp>
+      <p:sp>
+        <p:nvSpPr>
+          <p:cNvPr id="3" name="TextBox 2"/>
+          <p:cNvSpPr txBox="1"/>
+          <p:nvPr/>
+        </p:nvSpPr>
+        <p:spPr>
+          <a:xfrm>
+            <a:off x="502920" y="164592"/>
+            <a:ext cx="1143000" cy="201168"/>
+          </a:xfrm>
+          <a:prstGeom prst="rect">
+            <a:avLst/>
+          </a:prstGeom>
+          <a:noFill/>
+        </p:spPr>
+        <p:txBody>
+          <a:bodyPr wrap="square" anchor="t">
+            <a:spAutoFit/>
+          </a:bodyPr>
+          <a:lstStyle/>
+          <a:p>
+            <a:r>
+              <a:rPr sz="1100" b="1">
+                <a:solidFill>
+                  <a:srgbClr val="FFFFFF"/>
+                </a:solidFill>
+                <a:latin typeface="Aptos"/>
+              </a:rPr>
+              <a:t>WEEK 1</a:t>
+            </a:r>
+          </a:p>
+        </p:txBody>
+      </p:sp>
+      <p:sp>
+        <p:nvSpPr>
+          <p:cNvPr id="4" name="TextBox 3"/>
+          <p:cNvSpPr txBox="1"/>
+          <p:nvPr/>
+        </p:nvSpPr>
+        <p:spPr>
+          <a:xfrm>
+            <a:off x="1572768" y="109728"/>
+            <a:ext cx="6492240" cy="320040"/>
+          </a:xfrm>
+          <a:prstGeom prst="rect">
+            <a:avLst/>
+          </a:prstGeom>
+          <a:noFill/>
+        </p:spPr>
+        <p:txBody>
+          <a:bodyPr wrap="square" anchor="t">
+            <a:spAutoFit/>
+          </a:bodyPr>
+          <a:lstStyle/>
+          <a:p>
+            <a:r>
+              <a:rPr sz="2000" b="1">
+                <a:solidFill>
+                  <a:srgbClr val="FFFFFF"/>
+                </a:solidFill>
+                <a:latin typeface="Aptos"/>
+              </a:rPr>
+              <a:t>Meet Your AI Teammate</a:t>
+            </a:r>
+          </a:p>
+        </p:txBody>
+      </p:sp>
+      <p:sp>
+        <p:nvSpPr>
+          <p:cNvPr id="5" name="TextBox 4"/>
+          <p:cNvSpPr txBox="1"/>
+          <p:nvPr/>
+        </p:nvSpPr>
+        <p:spPr>
+          <a:xfrm>
+            <a:off x="7909560" y="173736"/>
+            <a:ext cx="3749039" cy="182880"/>
+          </a:xfrm>
+          <a:prstGeom prst="rect">
+            <a:avLst/>
+          </a:prstGeom>
+          <a:noFill/>
+        </p:spPr>
+        <p:txBody>
+          <a:bodyPr wrap="square" anchor="t">
+            <a:spAutoFit/>
+          </a:bodyPr>
+          <a:lstStyle/>
+          <a:p>
+            <a:pPr algn="r"/>
+            <a:r>
+              <a:rPr sz="1050" b="0">
+                <a:solidFill>
+                  <a:srgbClr val="FFFFFF"/>
+                </a:solidFill>
+                <a:latin typeface="Aptos"/>
+              </a:rPr>
+              <a:t>ChatGPT Basics</a:t>
+            </a:r>
+          </a:p>
+        </p:txBody>
+      </p:sp>
+      <p:sp>
+        <p:nvSpPr>
+          <p:cNvPr id="6" name="TextBox 5"/>
+          <p:cNvSpPr txBox="1"/>
+          <p:nvPr/>
+        </p:nvSpPr>
+        <p:spPr>
+          <a:xfrm>
+            <a:off x="658368" y="932688"/>
+            <a:ext cx="10698480" cy="475488"/>
+          </a:xfrm>
+          <a:prstGeom prst="rect">
+            <a:avLst/>
+          </a:prstGeom>
+          <a:noFill/>
+        </p:spPr>
+        <p:txBody>
+          <a:bodyPr wrap="square" anchor="t">
+            <a:spAutoFit/>
+          </a:bodyPr>
+          <a:lstStyle/>
+          <a:p>
+            <a:r>
+              <a:rPr sz="3100" b="1">
+                <a:solidFill>
+                  <a:srgbClr val="172033"/>
+                </a:solidFill>
+                <a:latin typeface="Aptos"/>
+              </a:rPr>
+              <a:t>Homework</a:t>
+            </a:r>
+          </a:p>
+        </p:txBody>
+      </p:sp>
+      <p:sp>
+        <p:nvSpPr>
+          <p:cNvPr id="7" name="TextBox 6"/>
+          <p:cNvSpPr txBox="1"/>
+          <p:nvPr/>
+        </p:nvSpPr>
+        <p:spPr>
+          <a:xfrm>
+            <a:off x="694944" y="1481328"/>
+            <a:ext cx="10424160" cy="256032"/>
+          </a:xfrm>
+          <a:prstGeom prst="rect">
+            <a:avLst/>
+          </a:prstGeom>
+          <a:noFill/>
+        </p:spPr>
+        <p:txBody>
+          <a:bodyPr wrap="square" anchor="t">
+            <a:spAutoFit/>
+          </a:bodyPr>
+          <a:lstStyle/>
+          <a:p>
+            <a:r>
+              <a:rPr sz="1500" b="0">
+                <a:solidFill>
+                  <a:srgbClr val="56657B"/>
+                </a:solidFill>
+                <a:latin typeface="Aptos"/>
+              </a:rPr>
+              <a:t>Editable: change this based on what you want students to do.</a:t>
+            </a:r>
+          </a:p>
+        </p:txBody>
+      </p:sp>
+      <p:sp>
+        <p:nvSpPr>
+          <p:cNvPr id="8" name="TextBox 7"/>
+          <p:cNvSpPr txBox="1"/>
+          <p:nvPr/>
+        </p:nvSpPr>
+        <p:spPr>
+          <a:xfrm>
+            <a:off x="411480" y="6519672"/>
+            <a:ext cx="5303520" cy="164592"/>
+          </a:xfrm>
+          <a:prstGeom prst="rect">
+            <a:avLst/>
+          </a:prstGeom>
+          <a:noFill/>
+        </p:spPr>
+        <p:txBody>
+          <a:bodyPr wrap="square" anchor="t">
+            <a:spAutoFit/>
+          </a:bodyPr>
+          <a:lstStyle/>
+          <a:p>
+            <a:r>
+              <a:rPr sz="850" b="0">
+                <a:solidFill>
+                  <a:srgbClr val="56657B"/>
+                </a:solidFill>
+                <a:latin typeface="Aptos"/>
+              </a:rPr>
+              <a:t>AI Builders Academy | Week 1</a:t>
+            </a:r>
+          </a:p>
+        </p:txBody>
+      </p:sp>
+      <p:sp>
+        <p:nvSpPr>
+          <p:cNvPr id="9" name="TextBox 8"/>
+          <p:cNvSpPr txBox="1"/>
+          <p:nvPr/>
+        </p:nvSpPr>
+        <p:spPr>
+          <a:xfrm>
+            <a:off x="10972800" y="6519672"/>
+            <a:ext cx="822960" cy="164592"/>
+          </a:xfrm>
+          <a:prstGeom prst="rect">
+            <a:avLst/>
+          </a:prstGeom>
+          <a:noFill/>
+        </p:spPr>
+        <p:txBody>
+          <a:bodyPr wrap="square" anchor="t">
+            <a:spAutoFit/>
+          </a:bodyPr>
+          <a:lstStyle/>
+          <a:p>
+            <a:pPr algn="r"/>
+            <a:r>
+              <a:rPr sz="850" b="0">
+                <a:solidFill>
+                  <a:srgbClr val="56657B"/>
+                </a:solidFill>
+                <a:latin typeface="Aptos"/>
+              </a:rPr>
+              <a:t>9/9</a:t>
+            </a:r>
+          </a:p>
+        </p:txBody>
+      </p:sp>
+      <p:sp>
+        <p:nvSpPr>
+          <p:cNvPr id="10" name="Rounded Rectangle 9"/>
+          <p:cNvSpPr/>
+          <p:nvPr/>
+        </p:nvSpPr>
+        <p:spPr>
+          <a:xfrm>
+            <a:off x="868680" y="1828800"/>
+            <a:ext cx="10469880" cy="1828800"/>
           </a:xfrm>
           <a:prstGeom prst="roundRect">
             <a:avLst/>
@@ -3607,14 +8191,14 @@
       </p:sp>
       <p:sp>
         <p:nvSpPr>
-          <p:cNvPr id="15" name="TextBox 14"/>
-          <p:cNvSpPr txBox="1"/>
-          <p:nvPr/>
-        </p:nvSpPr>
-        <p:spPr>
-          <a:xfrm>
-            <a:off x="6016752" y="987552"/>
-            <a:ext cx="5394960" cy="201168"/>
+          <p:cNvPr id="11" name="TextBox 10"/>
+          <p:cNvSpPr txBox="1"/>
+          <p:nvPr/>
+        </p:nvSpPr>
+        <p:spPr>
+          <a:xfrm>
+            <a:off x="1143000" y="2148840"/>
+            <a:ext cx="9875520" cy="502920"/>
           </a:xfrm>
           <a:prstGeom prst="rect">
             <a:avLst/>
@@ -3627,62 +8211,29 @@
           </a:bodyPr>
           <a:lstStyle/>
           <a:p>
-            <a:r>
-              <a:rPr sz="1300" b="1">
-                <a:solidFill>
-                  <a:srgbClr val="F97316"/>
+            <a:pPr algn="ctr"/>
+            <a:r>
+              <a:rPr sz="2500" b="1">
+                <a:solidFill>
+                  <a:srgbClr val="172033"/>
                 </a:solidFill>
                 <a:latin typeface="Aptos"/>
               </a:rPr>
-              <a:t>Homework - editable</a:t>
-            </a:r>
-          </a:p>
-        </p:txBody>
-      </p:sp>
-      <p:sp>
-        <p:nvSpPr>
-          <p:cNvPr id="16" name="TextBox 15"/>
-          <p:cNvSpPr txBox="1"/>
-          <p:nvPr/>
-        </p:nvSpPr>
-        <p:spPr>
-          <a:xfrm>
-            <a:off x="6016752" y="1280160"/>
-            <a:ext cx="5440680" cy="502920"/>
-          </a:xfrm>
-          <a:prstGeom prst="rect">
-            <a:avLst/>
-          </a:prstGeom>
-          <a:noFill/>
-        </p:spPr>
-        <p:txBody>
-          <a:bodyPr wrap="square" anchor="t">
-            <a:spAutoFit/>
-          </a:bodyPr>
-          <a:lstStyle/>
-          <a:p>
-            <a:r>
-              <a:rPr sz="1220" b="0">
-                <a:solidFill>
-                  <a:srgbClr val="172033"/>
-                </a:solidFill>
-                <a:latin typeface="Aptos"/>
-              </a:rPr>
-              <a:t>Create 5 example conversations with your assistant. Replace this with your own homework if needed.</a:t>
-            </a:r>
-          </a:p>
-        </p:txBody>
-      </p:sp>
-      <p:sp>
-        <p:nvSpPr>
-          <p:cNvPr id="17" name="Rounded Rectangle 16"/>
+              <a:t>Create an AI assistant with 5 example conversations. Edit this homework as needed.</a:t>
+            </a:r>
+          </a:p>
+        </p:txBody>
+      </p:sp>
+      <p:sp>
+        <p:nvSpPr>
+          <p:cNvPr id="12" name="Rounded Rectangle 11"/>
           <p:cNvSpPr/>
           <p:nvPr/>
         </p:nvSpPr>
         <p:spPr>
           <a:xfrm>
-            <a:off x="411480" y="2139696"/>
-            <a:ext cx="3520440" cy="1856231"/>
+            <a:off x="914400" y="4251960"/>
+            <a:ext cx="10241280" cy="914400"/>
           </a:xfrm>
           <a:prstGeom prst="roundRect">
             <a:avLst/>
@@ -3720,436 +8271,14 @@
       </p:sp>
       <p:sp>
         <p:nvSpPr>
-          <p:cNvPr id="18" name="Rectangle 17"/>
+          <p:cNvPr id="13" name="Rectangle 12"/>
           <p:cNvSpPr/>
           <p:nvPr/>
         </p:nvSpPr>
         <p:spPr>
           <a:xfrm>
-            <a:off x="411480" y="2139696"/>
-            <a:ext cx="73152" cy="1856231"/>
-          </a:xfrm>
-          <a:prstGeom prst="rect">
-            <a:avLst/>
-          </a:prstGeom>
-          <a:solidFill>
-            <a:srgbClr val="2563EB"/>
-          </a:solidFill>
-          <a:ln>
-            <a:solidFill>
-              <a:srgbClr val="2563EB"/>
-            </a:solidFill>
-          </a:ln>
-        </p:spPr>
-        <p:style>
-          <a:lnRef idx="1">
-            <a:schemeClr val="accent1"/>
-          </a:lnRef>
-          <a:fillRef idx="3">
-            <a:schemeClr val="accent1"/>
-          </a:fillRef>
-          <a:effectRef idx="2">
-            <a:schemeClr val="accent1"/>
-          </a:effectRef>
-          <a:fontRef idx="minor">
-            <a:schemeClr val="lt1"/>
-          </a:fontRef>
-        </p:style>
-        <p:txBody>
-          <a:bodyPr rtlCol="0" anchor="ctr"/>
-          <a:lstStyle/>
-          <a:p>
-            <a:pPr algn="ctr"/>
-          </a:p>
-        </p:txBody>
-      </p:sp>
-      <p:sp>
-        <p:nvSpPr>
-          <p:cNvPr id="19" name="TextBox 18"/>
-          <p:cNvSpPr txBox="1"/>
-          <p:nvPr/>
-        </p:nvSpPr>
-        <p:spPr>
-          <a:xfrm>
-            <a:off x="576072" y="2258568"/>
-            <a:ext cx="3209544" cy="219456"/>
-          </a:xfrm>
-          <a:prstGeom prst="rect">
-            <a:avLst/>
-          </a:prstGeom>
-          <a:noFill/>
-        </p:spPr>
-        <p:txBody>
-          <a:bodyPr wrap="square" anchor="t">
-            <a:spAutoFit/>
-          </a:bodyPr>
-          <a:lstStyle/>
-          <a:p>
-            <a:r>
-              <a:rPr sz="1300" b="1">
-                <a:solidFill>
-                  <a:srgbClr val="2563EB"/>
-                </a:solidFill>
-                <a:latin typeface="Aptos"/>
-              </a:rPr>
-              <a:t>90-minute flow</a:t>
-            </a:r>
-          </a:p>
-        </p:txBody>
-      </p:sp>
-      <p:sp>
-        <p:nvSpPr>
-          <p:cNvPr id="20" name="TextBox 19"/>
-          <p:cNvSpPr txBox="1"/>
-          <p:nvPr/>
-        </p:nvSpPr>
-        <p:spPr>
-          <a:xfrm>
-            <a:off x="612648" y="2569463"/>
-            <a:ext cx="3136392" cy="1353311"/>
-          </a:xfrm>
-          <a:prstGeom prst="rect">
-            <a:avLst/>
-          </a:prstGeom>
-          <a:noFill/>
-        </p:spPr>
-        <p:txBody>
-          <a:bodyPr wrap="square">
-            <a:spAutoFit/>
-          </a:bodyPr>
-          <a:lstStyle/>
-          <a:p>
-            <a:pPr>
-              <a:spcAft>
-                <a:spcPts val="500"/>
-              </a:spcAft>
-              <a:defRPr sz="1140">
-                <a:solidFill>
-                  <a:srgbClr val="172033"/>
-                </a:solidFill>
-                <a:latin typeface="Aptos"/>
-              </a:defRPr>
-            </a:pPr>
-            <a:r>
-              <a:t>0-10 Hook: Can AI do my homework?</a:t>
-            </a:r>
-          </a:p>
-          <a:p>
-            <a:pPr>
-              <a:spcAft>
-                <a:spcPts val="500"/>
-              </a:spcAft>
-              <a:defRPr sz="1140">
-                <a:solidFill>
-                  <a:srgbClr val="172033"/>
-                </a:solidFill>
-                <a:latin typeface="Aptos"/>
-              </a:defRPr>
-            </a:pPr>
-            <a:r>
-              <a:t>10-25 Demo: weak vs strong prompt</a:t>
-            </a:r>
-          </a:p>
-          <a:p>
-            <a:pPr>
-              <a:spcAft>
-                <a:spcPts val="500"/>
-              </a:spcAft>
-              <a:defRPr sz="1140">
-                <a:solidFill>
-                  <a:srgbClr val="172033"/>
-                </a:solidFill>
-                <a:latin typeface="Aptos"/>
-              </a:defRPr>
-            </a:pPr>
-            <a:r>
-              <a:t>25-70 Build: custom assistant</a:t>
-            </a:r>
-          </a:p>
-          <a:p>
-            <a:pPr>
-              <a:spcAft>
-                <a:spcPts val="500"/>
-              </a:spcAft>
-              <a:defRPr sz="1140">
-                <a:solidFill>
-                  <a:srgbClr val="172033"/>
-                </a:solidFill>
-                <a:latin typeface="Aptos"/>
-              </a:defRPr>
-            </a:pPr>
-            <a:r>
-              <a:t>70-85 Partner test</a:t>
-            </a:r>
-          </a:p>
-          <a:p>
-            <a:pPr>
-              <a:spcAft>
-                <a:spcPts val="500"/>
-              </a:spcAft>
-              <a:defRPr sz="1140">
-                <a:solidFill>
-                  <a:srgbClr val="172033"/>
-                </a:solidFill>
-                <a:latin typeface="Aptos"/>
-              </a:defRPr>
-            </a:pPr>
-            <a:r>
-              <a:t>85-90 Wrap</a:t>
-            </a:r>
-          </a:p>
-        </p:txBody>
-      </p:sp>
-      <p:sp>
-        <p:nvSpPr>
-          <p:cNvPr id="21" name="Rounded Rectangle 20"/>
-          <p:cNvSpPr/>
-          <p:nvPr/>
-        </p:nvSpPr>
-        <p:spPr>
-          <a:xfrm>
-            <a:off x="4160520" y="2139696"/>
-            <a:ext cx="3474720" cy="1856231"/>
-          </a:xfrm>
-          <a:prstGeom prst="roundRect">
-            <a:avLst/>
-          </a:prstGeom>
-          <a:solidFill>
-            <a:srgbClr val="F5F3FF"/>
-          </a:solidFill>
-          <a:ln>
-            <a:solidFill>
-              <a:srgbClr val="D9E2EE"/>
-            </a:solidFill>
-          </a:ln>
-        </p:spPr>
-        <p:style>
-          <a:lnRef idx="1">
-            <a:schemeClr val="accent1"/>
-          </a:lnRef>
-          <a:fillRef idx="3">
-            <a:schemeClr val="accent1"/>
-          </a:fillRef>
-          <a:effectRef idx="2">
-            <a:schemeClr val="accent1"/>
-          </a:effectRef>
-          <a:fontRef idx="minor">
-            <a:schemeClr val="lt1"/>
-          </a:fontRef>
-        </p:style>
-        <p:txBody>
-          <a:bodyPr rtlCol="0" anchor="ctr"/>
-          <a:lstStyle/>
-          <a:p>
-            <a:pPr algn="ctr"/>
-          </a:p>
-        </p:txBody>
-      </p:sp>
-      <p:sp>
-        <p:nvSpPr>
-          <p:cNvPr id="22" name="Rectangle 21"/>
-          <p:cNvSpPr/>
-          <p:nvPr/>
-        </p:nvSpPr>
-        <p:spPr>
-          <a:xfrm>
-            <a:off x="4160520" y="2139696"/>
-            <a:ext cx="73152" cy="1856231"/>
-          </a:xfrm>
-          <a:prstGeom prst="rect">
-            <a:avLst/>
-          </a:prstGeom>
-          <a:solidFill>
-            <a:srgbClr val="7C3AED"/>
-          </a:solidFill>
-          <a:ln>
-            <a:solidFill>
-              <a:srgbClr val="7C3AED"/>
-            </a:solidFill>
-          </a:ln>
-        </p:spPr>
-        <p:style>
-          <a:lnRef idx="1">
-            <a:schemeClr val="accent1"/>
-          </a:lnRef>
-          <a:fillRef idx="3">
-            <a:schemeClr val="accent1"/>
-          </a:fillRef>
-          <a:effectRef idx="2">
-            <a:schemeClr val="accent1"/>
-          </a:effectRef>
-          <a:fontRef idx="minor">
-            <a:schemeClr val="lt1"/>
-          </a:fontRef>
-        </p:style>
-        <p:txBody>
-          <a:bodyPr rtlCol="0" anchor="ctr"/>
-          <a:lstStyle/>
-          <a:p>
-            <a:pPr algn="ctr"/>
-          </a:p>
-        </p:txBody>
-      </p:sp>
-      <p:sp>
-        <p:nvSpPr>
-          <p:cNvPr id="23" name="TextBox 22"/>
-          <p:cNvSpPr txBox="1"/>
-          <p:nvPr/>
-        </p:nvSpPr>
-        <p:spPr>
-          <a:xfrm>
-            <a:off x="4325112" y="2258568"/>
-            <a:ext cx="3163824" cy="219456"/>
-          </a:xfrm>
-          <a:prstGeom prst="rect">
-            <a:avLst/>
-          </a:prstGeom>
-          <a:noFill/>
-        </p:spPr>
-        <p:txBody>
-          <a:bodyPr wrap="square" anchor="t">
-            <a:spAutoFit/>
-          </a:bodyPr>
-          <a:lstStyle/>
-          <a:p>
-            <a:r>
-              <a:rPr sz="1300" b="1">
-                <a:solidFill>
-                  <a:srgbClr val="7C3AED"/>
-                </a:solidFill>
-                <a:latin typeface="Aptos"/>
-              </a:rPr>
-              <a:t>Interactive moments</a:t>
-            </a:r>
-          </a:p>
-        </p:txBody>
-      </p:sp>
-      <p:sp>
-        <p:nvSpPr>
-          <p:cNvPr id="24" name="TextBox 23"/>
-          <p:cNvSpPr txBox="1"/>
-          <p:nvPr/>
-        </p:nvSpPr>
-        <p:spPr>
-          <a:xfrm>
-            <a:off x="4361688" y="2569463"/>
-            <a:ext cx="3090672" cy="1353311"/>
-          </a:xfrm>
-          <a:prstGeom prst="rect">
-            <a:avLst/>
-          </a:prstGeom>
-          <a:noFill/>
-        </p:spPr>
-        <p:txBody>
-          <a:bodyPr wrap="square">
-            <a:spAutoFit/>
-          </a:bodyPr>
-          <a:lstStyle/>
-          <a:p>
-            <a:pPr>
-              <a:spcAft>
-                <a:spcPts val="500"/>
-              </a:spcAft>
-              <a:defRPr sz="1140">
-                <a:solidFill>
-                  <a:srgbClr val="172033"/>
-                </a:solidFill>
-                <a:latin typeface="Aptos"/>
-              </a:defRPr>
-            </a:pPr>
-            <a:r>
-              <a:t>Thumb vote: helpful or lazy?</a:t>
-            </a:r>
-          </a:p>
-          <a:p>
-            <a:pPr>
-              <a:spcAft>
-                <a:spcPts val="500"/>
-              </a:spcAft>
-              <a:defRPr sz="1140">
-                <a:solidFill>
-                  <a:srgbClr val="172033"/>
-                </a:solidFill>
-                <a:latin typeface="Aptos"/>
-              </a:defRPr>
-            </a:pPr>
-            <a:r>
-              <a:t>Pair test: ask your partner's assistant one question</a:t>
-            </a:r>
-          </a:p>
-          <a:p>
-            <a:pPr>
-              <a:spcAft>
-                <a:spcPts val="500"/>
-              </a:spcAft>
-              <a:defRPr sz="1140">
-                <a:solidFill>
-                  <a:srgbClr val="172033"/>
-                </a:solidFill>
-                <a:latin typeface="Aptos"/>
-              </a:defRPr>
-            </a:pPr>
-            <a:r>
-              <a:t>Debug moment: make a vague prompt clearer</a:t>
-            </a:r>
-          </a:p>
-        </p:txBody>
-      </p:sp>
-      <p:sp>
-        <p:nvSpPr>
-          <p:cNvPr id="25" name="Rounded Rectangle 24"/>
-          <p:cNvSpPr/>
-          <p:nvPr/>
-        </p:nvSpPr>
-        <p:spPr>
-          <a:xfrm>
-            <a:off x="7863840" y="2139696"/>
-            <a:ext cx="3886200" cy="1856231"/>
-          </a:xfrm>
-          <a:prstGeom prst="roundRect">
-            <a:avLst/>
-          </a:prstGeom>
-          <a:solidFill>
-            <a:srgbClr val="EFF6FF"/>
-          </a:solidFill>
-          <a:ln>
-            <a:solidFill>
-              <a:srgbClr val="D9E2EE"/>
-            </a:solidFill>
-          </a:ln>
-        </p:spPr>
-        <p:style>
-          <a:lnRef idx="1">
-            <a:schemeClr val="accent1"/>
-          </a:lnRef>
-          <a:fillRef idx="3">
-            <a:schemeClr val="accent1"/>
-          </a:fillRef>
-          <a:effectRef idx="2">
-            <a:schemeClr val="accent1"/>
-          </a:effectRef>
-          <a:fontRef idx="minor">
-            <a:schemeClr val="lt1"/>
-          </a:fontRef>
-        </p:style>
-        <p:txBody>
-          <a:bodyPr rtlCol="0" anchor="ctr"/>
-          <a:lstStyle/>
-          <a:p>
-            <a:pPr algn="ctr"/>
-          </a:p>
-        </p:txBody>
-      </p:sp>
-      <p:sp>
-        <p:nvSpPr>
-          <p:cNvPr id="26" name="Rectangle 25"/>
-          <p:cNvSpPr/>
-          <p:nvPr/>
-        </p:nvSpPr>
-        <p:spPr>
-          <a:xfrm>
-            <a:off x="7863840" y="2139696"/>
-            <a:ext cx="73152" cy="1856231"/>
+            <a:off x="914400" y="4251960"/>
+            <a:ext cx="73152" cy="914400"/>
           </a:xfrm>
           <a:prstGeom prst="rect">
             <a:avLst/>
@@ -4187,14 +8316,14 @@
       </p:sp>
       <p:sp>
         <p:nvSpPr>
-          <p:cNvPr id="27" name="TextBox 26"/>
-          <p:cNvSpPr txBox="1"/>
-          <p:nvPr/>
-        </p:nvSpPr>
-        <p:spPr>
-          <a:xfrm>
-            <a:off x="8028431" y="2258568"/>
-            <a:ext cx="3575304" cy="219456"/>
+          <p:cNvPr id="14" name="TextBox 13"/>
+          <p:cNvSpPr txBox="1"/>
+          <p:nvPr/>
+        </p:nvSpPr>
+        <p:spPr>
+          <a:xfrm>
+            <a:off x="1078992" y="4379976"/>
+            <a:ext cx="9921240" cy="219456"/>
           </a:xfrm>
           <a:prstGeom prst="rect">
             <a:avLst/>
@@ -4214,422 +8343,41 @@
                 </a:solidFill>
                 <a:latin typeface="Aptos"/>
               </a:rPr>
-              <a:t>Tutor moves</a:t>
-            </a:r>
-          </a:p>
-        </p:txBody>
-      </p:sp>
-      <p:sp>
-        <p:nvSpPr>
-          <p:cNvPr id="28" name="TextBox 27"/>
-          <p:cNvSpPr txBox="1"/>
-          <p:nvPr/>
-        </p:nvSpPr>
-        <p:spPr>
-          <a:xfrm>
-            <a:off x="8065008" y="2569463"/>
-            <a:ext cx="3502152" cy="1353311"/>
-          </a:xfrm>
-          <a:prstGeom prst="rect">
-            <a:avLst/>
-          </a:prstGeom>
-          <a:noFill/>
-        </p:spPr>
-        <p:txBody>
-          <a:bodyPr wrap="square">
-            <a:spAutoFit/>
-          </a:bodyPr>
-          <a:lstStyle/>
-          <a:p>
-            <a:pPr>
-              <a:spcAft>
-                <a:spcPts val="500"/>
-              </a:spcAft>
-              <a:defRPr sz="1140">
+              <a:t>Assessment reminder</a:t>
+            </a:r>
+          </a:p>
+        </p:txBody>
+      </p:sp>
+      <p:sp>
+        <p:nvSpPr>
+          <p:cNvPr id="15" name="TextBox 14"/>
+          <p:cNvSpPr txBox="1"/>
+          <p:nvPr/>
+        </p:nvSpPr>
+        <p:spPr>
+          <a:xfrm>
+            <a:off x="1078992" y="4690872"/>
+            <a:ext cx="9912096" cy="411479"/>
+          </a:xfrm>
+          <a:prstGeom prst="rect">
+            <a:avLst/>
+          </a:prstGeom>
+          <a:noFill/>
+        </p:spPr>
+        <p:txBody>
+          <a:bodyPr wrap="square" anchor="t">
+            <a:spAutoFit/>
+          </a:bodyPr>
+          <a:lstStyle/>
+          <a:p>
+            <a:r>
+              <a:rPr sz="1400" b="0">
                 <a:solidFill>
                   <a:srgbClr val="172033"/>
                 </a:solidFill>
                 <a:latin typeface="Aptos"/>
-              </a:defRPr>
-            </a:pPr>
-            <a:r>
-              <a:t>Ask students to predict before AI answers.</a:t>
-            </a:r>
-          </a:p>
-          <a:p>
-            <a:pPr>
-              <a:spcAft>
-                <a:spcPts val="500"/>
-              </a:spcAft>
-              <a:defRPr sz="1140">
-                <a:solidFill>
-                  <a:srgbClr val="172033"/>
-                </a:solidFill>
-                <a:latin typeface="Aptos"/>
-              </a:defRPr>
-            </a:pPr>
-            <a:r>
-              <a:t>Pause after every demo to name what changed.</a:t>
-            </a:r>
-          </a:p>
-          <a:p>
-            <a:pPr>
-              <a:spcAft>
-                <a:spcPts val="500"/>
-              </a:spcAft>
-              <a:defRPr sz="1140">
-                <a:solidFill>
-                  <a:srgbClr val="172033"/>
-                </a:solidFill>
-                <a:latin typeface="Aptos"/>
-              </a:defRPr>
-            </a:pPr>
-            <a:r>
-              <a:t>Make one small improvement, then test.</a:t>
-            </a:r>
-          </a:p>
-        </p:txBody>
-      </p:sp>
-      <p:sp>
-        <p:nvSpPr>
-          <p:cNvPr id="29" name="TextBox 28"/>
-          <p:cNvSpPr txBox="1"/>
-          <p:nvPr/>
-        </p:nvSpPr>
-        <p:spPr>
-          <a:xfrm>
-            <a:off x="502920" y="4251960"/>
-            <a:ext cx="2011680" cy="201168"/>
-          </a:xfrm>
-          <a:prstGeom prst="rect">
-            <a:avLst/>
-          </a:prstGeom>
-          <a:noFill/>
-        </p:spPr>
-        <p:txBody>
-          <a:bodyPr wrap="square" anchor="t">
-            <a:spAutoFit/>
-          </a:bodyPr>
-          <a:lstStyle/>
-          <a:p>
-            <a:r>
-              <a:rPr sz="1500" b="1">
-                <a:solidFill>
-                  <a:srgbClr val="0F172A"/>
-                </a:solidFill>
-                <a:latin typeface="Aptos"/>
               </a:rPr>
-              <a:t>Live demo prompt</a:t>
-            </a:r>
-          </a:p>
-        </p:txBody>
-      </p:sp>
-      <p:sp>
-        <p:nvSpPr>
-          <p:cNvPr id="30" name="Rounded Rectangle 29"/>
-          <p:cNvSpPr/>
-          <p:nvPr/>
-        </p:nvSpPr>
-        <p:spPr>
-          <a:xfrm>
-            <a:off x="411480" y="4526280"/>
-            <a:ext cx="7315200" cy="1371600"/>
-          </a:xfrm>
-          <a:prstGeom prst="roundRect">
-            <a:avLst/>
-          </a:prstGeom>
-          <a:solidFill>
-            <a:srgbClr val="0F172A"/>
-          </a:solidFill>
-          <a:ln>
-            <a:solidFill>
-              <a:srgbClr val="0F172A"/>
-            </a:solidFill>
-          </a:ln>
-        </p:spPr>
-        <p:style>
-          <a:lnRef idx="1">
-            <a:schemeClr val="accent1"/>
-          </a:lnRef>
-          <a:fillRef idx="3">
-            <a:schemeClr val="accent1"/>
-          </a:fillRef>
-          <a:effectRef idx="2">
-            <a:schemeClr val="accent1"/>
-          </a:effectRef>
-          <a:fontRef idx="minor">
-            <a:schemeClr val="lt1"/>
-          </a:fontRef>
-        </p:style>
-        <p:txBody>
-          <a:bodyPr rtlCol="0" anchor="ctr"/>
-          <a:lstStyle/>
-          <a:p>
-            <a:pPr algn="ctr"/>
-          </a:p>
-        </p:txBody>
-      </p:sp>
-      <p:sp>
-        <p:nvSpPr>
-          <p:cNvPr id="31" name="TextBox 30"/>
-          <p:cNvSpPr txBox="1"/>
-          <p:nvPr/>
-        </p:nvSpPr>
-        <p:spPr>
-          <a:xfrm>
-            <a:off x="594360" y="4709160"/>
-            <a:ext cx="6931152" cy="960120"/>
-          </a:xfrm>
-          <a:prstGeom prst="rect">
-            <a:avLst/>
-          </a:prstGeom>
-          <a:noFill/>
-        </p:spPr>
-        <p:txBody>
-          <a:bodyPr wrap="square" anchor="t">
-            <a:spAutoFit/>
-          </a:bodyPr>
-          <a:lstStyle/>
-          <a:p>
-            <a:r>
-              <a:rPr sz="1140" b="0">
-                <a:solidFill>
-                  <a:srgbClr val="FFFFFF"/>
-                </a:solidFill>
-                <a:latin typeface="Aptos"/>
-              </a:rPr>
-              <a:t>Act as a friendly study coach for a high school student.</a:t>
-            </a:r>
-            <a:br/>
-            <a:r>
-              <a:t>Help me study [topic]. Ask one question at a time. If I get it wrong, explain simply and let me try again.</a:t>
-            </a:r>
-          </a:p>
-        </p:txBody>
-      </p:sp>
-      <p:sp>
-        <p:nvSpPr>
-          <p:cNvPr id="32" name="Rounded Rectangle 31"/>
-          <p:cNvSpPr/>
-          <p:nvPr/>
-        </p:nvSpPr>
-        <p:spPr>
-          <a:xfrm>
-            <a:off x="7973568" y="4526280"/>
-            <a:ext cx="3776472" cy="1371600"/>
-          </a:xfrm>
-          <a:prstGeom prst="roundRect">
-            <a:avLst/>
-          </a:prstGeom>
-          <a:solidFill>
-            <a:srgbClr val="ECFDF5"/>
-          </a:solidFill>
-          <a:ln>
-            <a:solidFill>
-              <a:srgbClr val="D9E2EE"/>
-            </a:solidFill>
-          </a:ln>
-        </p:spPr>
-        <p:style>
-          <a:lnRef idx="1">
-            <a:schemeClr val="accent1"/>
-          </a:lnRef>
-          <a:fillRef idx="3">
-            <a:schemeClr val="accent1"/>
-          </a:fillRef>
-          <a:effectRef idx="2">
-            <a:schemeClr val="accent1"/>
-          </a:effectRef>
-          <a:fontRef idx="minor">
-            <a:schemeClr val="lt1"/>
-          </a:fontRef>
-        </p:style>
-        <p:txBody>
-          <a:bodyPr rtlCol="0" anchor="ctr"/>
-          <a:lstStyle/>
-          <a:p>
-            <a:pPr algn="ctr"/>
-          </a:p>
-        </p:txBody>
-      </p:sp>
-      <p:sp>
-        <p:nvSpPr>
-          <p:cNvPr id="33" name="Rectangle 32"/>
-          <p:cNvSpPr/>
-          <p:nvPr/>
-        </p:nvSpPr>
-        <p:spPr>
-          <a:xfrm>
-            <a:off x="7973568" y="4526280"/>
-            <a:ext cx="73152" cy="1371600"/>
-          </a:xfrm>
-          <a:prstGeom prst="rect">
-            <a:avLst/>
-          </a:prstGeom>
-          <a:solidFill>
-            <a:srgbClr val="0F9F6E"/>
-          </a:solidFill>
-          <a:ln>
-            <a:solidFill>
-              <a:srgbClr val="0F9F6E"/>
-            </a:solidFill>
-          </a:ln>
-        </p:spPr>
-        <p:style>
-          <a:lnRef idx="1">
-            <a:schemeClr val="accent1"/>
-          </a:lnRef>
-          <a:fillRef idx="3">
-            <a:schemeClr val="accent1"/>
-          </a:fillRef>
-          <a:effectRef idx="2">
-            <a:schemeClr val="accent1"/>
-          </a:effectRef>
-          <a:fontRef idx="minor">
-            <a:schemeClr val="lt1"/>
-          </a:fontRef>
-        </p:style>
-        <p:txBody>
-          <a:bodyPr rtlCol="0" anchor="ctr"/>
-          <a:lstStyle/>
-          <a:p>
-            <a:pPr algn="ctr"/>
-          </a:p>
-        </p:txBody>
-      </p:sp>
-      <p:sp>
-        <p:nvSpPr>
-          <p:cNvPr id="34" name="TextBox 33"/>
-          <p:cNvSpPr txBox="1"/>
-          <p:nvPr/>
-        </p:nvSpPr>
-        <p:spPr>
-          <a:xfrm>
-            <a:off x="8138160" y="4645152"/>
-            <a:ext cx="3465576" cy="219456"/>
-          </a:xfrm>
-          <a:prstGeom prst="rect">
-            <a:avLst/>
-          </a:prstGeom>
-          <a:noFill/>
-        </p:spPr>
-        <p:txBody>
-          <a:bodyPr wrap="square" anchor="t">
-            <a:spAutoFit/>
-          </a:bodyPr>
-          <a:lstStyle/>
-          <a:p>
-            <a:r>
-              <a:rPr sz="1300" b="1">
-                <a:solidFill>
-                  <a:srgbClr val="0F9F6E"/>
-                </a:solidFill>
-                <a:latin typeface="Aptos"/>
-              </a:rPr>
-              <a:t>Exit ticket</a:t>
-            </a:r>
-          </a:p>
-        </p:txBody>
-      </p:sp>
-      <p:sp>
-        <p:nvSpPr>
-          <p:cNvPr id="35" name="TextBox 34"/>
-          <p:cNvSpPr txBox="1"/>
-          <p:nvPr/>
-        </p:nvSpPr>
-        <p:spPr>
-          <a:xfrm>
-            <a:off x="8138160" y="4937760"/>
-            <a:ext cx="3465576" cy="914400"/>
-          </a:xfrm>
-          <a:prstGeom prst="rect">
-            <a:avLst/>
-          </a:prstGeom>
-          <a:noFill/>
-        </p:spPr>
-        <p:txBody>
-          <a:bodyPr wrap="square" anchor="t">
-            <a:spAutoFit/>
-          </a:bodyPr>
-          <a:lstStyle/>
-          <a:p>
-            <a:r>
-              <a:rPr sz="1220" b="0">
-                <a:solidFill>
-                  <a:srgbClr val="172033"/>
-                </a:solidFill>
-                <a:latin typeface="Aptos"/>
-              </a:rPr>
-              <a:t>Before students leave, ask: What did you make? What was one prompt that helped? What is one thing you would change next?</a:t>
-            </a:r>
-          </a:p>
-        </p:txBody>
-      </p:sp>
-      <p:sp>
-        <p:nvSpPr>
-          <p:cNvPr id="36" name="TextBox 35"/>
-          <p:cNvSpPr txBox="1"/>
-          <p:nvPr/>
-        </p:nvSpPr>
-        <p:spPr>
-          <a:xfrm>
-            <a:off x="411480" y="6537960"/>
-            <a:ext cx="5852160" cy="155448"/>
-          </a:xfrm>
-          <a:prstGeom prst="rect">
-            <a:avLst/>
-          </a:prstGeom>
-          <a:noFill/>
-        </p:spPr>
-        <p:txBody>
-          <a:bodyPr wrap="square" anchor="t">
-            <a:spAutoFit/>
-          </a:bodyPr>
-          <a:lstStyle/>
-          <a:p>
-            <a:r>
-              <a:rPr sz="850" b="0">
-                <a:solidFill>
-                  <a:srgbClr val="56657B"/>
-                </a:solidFill>
-                <a:latin typeface="Aptos"/>
-              </a:rPr>
-              <a:t>AI Builders Academy | Separate weekly lesson slide</a:t>
-            </a:r>
-          </a:p>
-        </p:txBody>
-      </p:sp>
-      <p:sp>
-        <p:nvSpPr>
-          <p:cNvPr id="37" name="TextBox 36"/>
-          <p:cNvSpPr txBox="1"/>
-          <p:nvPr/>
-        </p:nvSpPr>
-        <p:spPr>
-          <a:xfrm>
-            <a:off x="11018520" y="6537960"/>
-            <a:ext cx="777240" cy="155448"/>
-          </a:xfrm>
-          <a:prstGeom prst="rect">
-            <a:avLst/>
-          </a:prstGeom>
-          <a:noFill/>
-        </p:spPr>
-        <p:txBody>
-          <a:bodyPr wrap="square" anchor="t">
-            <a:spAutoFit/>
-          </a:bodyPr>
-          <a:lstStyle/>
-          <a:p>
-            <a:pPr algn="r"/>
-            <a:r>
-              <a:rPr sz="850" b="0">
-                <a:solidFill>
-                  <a:srgbClr val="56657B"/>
-                </a:solidFill>
-                <a:latin typeface="Aptos"/>
-              </a:rPr>
-              <a:t>Week 1</a:t>
+              <a:t>Assessment is based on projects, not tests. Students should be able to show what they made and explain one improvement.</a:t>
             </a:r>
           </a:p>
         </p:txBody>
